--- a/1 Year 12 Weekly/Week 04 (21 Sep) 1.1.3 Storage + 2.1.1 Abstraction/1 Lesson 1.1.3.pptx
+++ b/1 Year 12 Weekly/Week 04 (21 Sep) 1.1.3 Storage + 2.1.1 Abstraction/1 Lesson 1.1.3.pptx
@@ -18,6 +18,23 @@
     <p:sldId id="266" r:id="rId17"/>
     <p:sldId id="267" r:id="rId18"/>
     <p:sldId id="268" r:id="rId19"/>
+    <p:sldId id="269" r:id="rId20"/>
+    <p:sldId id="270" r:id="rId21"/>
+    <p:sldId id="271" r:id="rId22"/>
+    <p:sldId id="272" r:id="rId23"/>
+    <p:sldId id="273" r:id="rId24"/>
+    <p:sldId id="274" r:id="rId25"/>
+    <p:sldId id="275" r:id="rId26"/>
+    <p:sldId id="276" r:id="rId27"/>
+    <p:sldId id="277" r:id="rId28"/>
+    <p:sldId id="278" r:id="rId29"/>
+    <p:sldId id="279" r:id="rId30"/>
+    <p:sldId id="280" r:id="rId31"/>
+    <p:sldId id="281" r:id="rId32"/>
+    <p:sldId id="282" r:id="rId33"/>
+    <p:sldId id="283" r:id="rId34"/>
+    <p:sldId id="284" r:id="rId35"/>
+    <p:sldId id="285" r:id="rId36"/>
   </p:sldIdLst>
   <p:sldSz cx="12191695" cy="6858000" type="screen4x3"/>
   <p:notesSz cx="6858000" cy="9144000"/>
@@ -3182,7 +3199,7 @@
                 </a:solidFill>
                 <a:latin typeface="Calibri"/>
               </a:rPr>
-              <a:t>Lesson deck — editable skeleton: adapt freely.</a:t>
+              <a:t>Week 04 (21 Sep)</a:t>
             </a:r>
           </a:p>
         </p:txBody>
@@ -3242,7 +3259,7 @@
                 </a:solidFill>
                 <a:latin typeface="Calibri"/>
               </a:rPr>
-              <a:t>Worked example</a:t>
+              <a:t>Flash and solid-state storage</a:t>
             </a:r>
           </a:p>
         </p:txBody>
@@ -3271,29 +3288,17 @@
           <a:p>
             <a:pPr/>
             <a:r>
-              <a:rPr sz="2200" b="1">
-                <a:solidFill>
-                  <a:srgbClr val="2B6CB0"/>
-                </a:solidFill>
-                <a:latin typeface="Calibri"/>
-              </a:rPr>
-              <a:t>Justifying a device choice against a scenario</a:t>
-            </a:r>
-          </a:p>
-          <a:p>
-            <a:pPr lvl="1"/>
-            <a:r>
               <a:rPr sz="2000" b="0">
                 <a:solidFill>
                   <a:srgbClr val="222222"/>
                 </a:solidFill>
                 <a:latin typeface="Calibri"/>
               </a:rPr>
-              <a:t>1. Read the requirements carefully: portable storage for large video files, frequently rewritten, fast transfer, durable</a:t>
-            </a:r>
-          </a:p>
-          <a:p>
-            <a:pPr lvl="1"/>
+              <a:t>Stores data by trapping electrons in memory cells (EEPROM); no moving parts</a:t>
+            </a:r>
+          </a:p>
+          <a:p>
+            <a:pPr/>
             <a:r>
               <a:rPr sz="2000" b="0">
                 <a:solidFill>
@@ -3301,11 +3306,11 @@
                 </a:solidFill>
                 <a:latin typeface="Calibri"/>
               </a:rPr>
-              <a:t>2. Match each requirement to a characteristic rather than listing generic pros</a:t>
-            </a:r>
-          </a:p>
-          <a:p>
-            <a:pPr lvl="1"/>
+              <a:t>Fast, silent, low power, shock-resistant and portable (SSD, USB stick, SD card)</a:t>
+            </a:r>
+          </a:p>
+          <a:p>
+            <a:pPr/>
             <a:r>
               <a:rPr sz="2000" b="0">
                 <a:solidFill>
@@ -3313,11 +3318,11 @@
                 </a:solidFill>
                 <a:latin typeface="Calibri"/>
               </a:rPr>
-              <a:t>3. Choose flash/SSD (external SSD or USB flash drive) as the recommendation</a:t>
-            </a:r>
-          </a:p>
-          <a:p>
-            <a:pPr lvl="1"/>
+              <a:t>Higher cost per gigabyte than magnetic</a:t>
+            </a:r>
+          </a:p>
+          <a:p>
+            <a:pPr/>
             <a:r>
               <a:rPr sz="2000" b="0">
                 <a:solidFill>
@@ -3325,19 +3330,7 @@
                 </a:solidFill>
                 <a:latin typeface="Calibri"/>
               </a:rPr>
-              <a:t>4. Justify: no moving parts gives durability and portability; high transfer speeds suit large video files; easily rewritable for frequent changes</a:t>
-            </a:r>
-          </a:p>
-          <a:p>
-            <a:pPr lvl="1"/>
-            <a:r>
-              <a:rPr sz="2000" b="0">
-                <a:solidFill>
-                  <a:srgbClr val="222222"/>
-                </a:solidFill>
-                <a:latin typeface="Calibri"/>
-              </a:rPr>
-              <a:t>5. Compare against an alternative (e.g. an HDD is cheaper per GB but slower and fragile when carried), then state the conclusion linked to the scenario</a:t>
+              <a:t>Cells survive a finite number of writes; wear levelling spreads writes to extend life</a:t>
             </a:r>
           </a:p>
         </p:txBody>
@@ -3397,7 +3390,7 @@
                 </a:solidFill>
                 <a:latin typeface="Calibri"/>
               </a:rPr>
-              <a:t>Your turn</a:t>
+              <a:t>Optical storage: CD, DVD, Blu-ray</a:t>
             </a:r>
           </a:p>
         </p:txBody>
@@ -3426,48 +3419,49 @@
           <a:p>
             <a:pPr/>
             <a:r>
-              <a:rPr sz="2400" b="1">
-                <a:solidFill>
-                  <a:srgbClr val="2B6CB0"/>
-                </a:solidFill>
-                <a:latin typeface="Calibri"/>
-              </a:rPr>
-              <a:t>Task</a:t>
-            </a:r>
-          </a:p>
-          <a:p>
-            <a:pPr lvl="1"/>
-            <a:r>
-              <a:rPr sz="2200" b="0">
-                <a:solidFill>
-                  <a:srgbClr val="222222"/>
-                </a:solidFill>
-                <a:latin typeface="Calibri"/>
-              </a:rPr>
-              <a:t>Give students three short scenarios (e.g. high-volume office printing, occasional home photo printing, long-term cheap archive). For each, recommend a device/storage type and justify it by linking specific characteristics to the stated requirements.</a:t>
-            </a:r>
-          </a:p>
-          <a:p>
-            <a:r>
-              <a:rPr sz="2400" b="1">
-                <a:solidFill>
-                  <a:srgbClr val="B76E00"/>
-                </a:solidFill>
-                <a:latin typeface="Calibri"/>
-              </a:rPr>
-              <a:t>Challenge / stretch</a:t>
-            </a:r>
-          </a:p>
-          <a:p>
-            <a:pPr lvl="1"/>
-            <a:r>
-              <a:rPr sz="2200" b="0">
-                <a:solidFill>
-                  <a:srgbClr val="222222"/>
-                </a:solidFill>
-                <a:latin typeface="Calibri"/>
-              </a:rPr>
-              <a:t>Write a five-mark style answer recommending a printer for both a busy office and an occasional home photo user, using comparison language (whereas) so every characteristic is tied to a requirement and a justified judgement is reached.</a:t>
+              <a:rPr sz="2000" b="0">
+                <a:solidFill>
+                  <a:srgbClr val="222222"/>
+                </a:solidFill>
+                <a:latin typeface="Calibri"/>
+              </a:rPr>
+              <a:t>A laser reads pits and lands on the disc surface by the difference in reflected light</a:t>
+            </a:r>
+          </a:p>
+          <a:p>
+            <a:pPr/>
+            <a:r>
+              <a:rPr sz="2000" b="0">
+                <a:solidFill>
+                  <a:srgbClr val="222222"/>
+                </a:solidFill>
+                <a:latin typeface="Calibri"/>
+              </a:rPr>
+              <a:t>Very cheap per disc, light and easy to post or distribute</a:t>
+            </a:r>
+          </a:p>
+          <a:p>
+            <a:pPr/>
+            <a:r>
+              <a:rPr sz="2000" b="0">
+                <a:solidFill>
+                  <a:srgbClr val="222222"/>
+                </a:solidFill>
+                <a:latin typeface="Calibri"/>
+              </a:rPr>
+              <a:t>Low capacity (CD 700 MB, DVD 4.7 GB, Blu-ray 25 GB) and slow</a:t>
+            </a:r>
+          </a:p>
+          <a:p>
+            <a:pPr/>
+            <a:r>
+              <a:rPr sz="2000" b="0">
+                <a:solidFill>
+                  <a:srgbClr val="222222"/>
+                </a:solidFill>
+                <a:latin typeface="Calibri"/>
+              </a:rPr>
+              <a:t>Easily scratched, and many modern devices no longer have optical drives</a:t>
             </a:r>
           </a:p>
         </p:txBody>
@@ -3527,7 +3521,7 @@
                 </a:solidFill>
                 <a:latin typeface="Calibri"/>
               </a:rPr>
-              <a:t>Exit ticket</a:t>
+              <a:t>Picking storage: characteristics vs requirements</a:t>
             </a:r>
           </a:p>
         </p:txBody>
@@ -3554,36 +3548,63 @@
           </a:bodyPr>
           <a:lstStyle/>
           <a:p>
-            <a:r>
-              <a:rPr sz="2200" b="1">
-                <a:solidFill>
-                  <a:srgbClr val="222222"/>
-                </a:solidFill>
-                <a:latin typeface="Calibri"/>
-              </a:rPr>
-              <a:t>1. Why is flash/SSD storage more durable than a magnetic HDD?</a:t>
-            </a:r>
-          </a:p>
-          <a:p>
-            <a:r>
-              <a:rPr sz="2200" b="1">
-                <a:solidFill>
-                  <a:srgbClr val="222222"/>
-                </a:solidFill>
-                <a:latin typeface="Calibri"/>
-              </a:rPr>
-              <a:t>2. What does volatile mean, and which of RAM/ROM is volatile?</a:t>
-            </a:r>
-          </a:p>
-          <a:p>
-            <a:r>
-              <a:rPr sz="2200" b="1">
-                <a:solidFill>
-                  <a:srgbClr val="222222"/>
-                </a:solidFill>
-                <a:latin typeface="Calibri"/>
-              </a:rPr>
-              <a:t>3. Define disk thrashing.</a:t>
+            <a:pPr/>
+            <a:r>
+              <a:rPr sz="2000" b="0">
+                <a:solidFill>
+                  <a:srgbClr val="222222"/>
+                </a:solidFill>
+                <a:latin typeface="Calibri"/>
+              </a:rPr>
+              <a:t>Weigh capacity, speed, portability, durability, cost per gigabyte and access type</a:t>
+            </a:r>
+          </a:p>
+          <a:p>
+            <a:pPr/>
+            <a:r>
+              <a:rPr sz="2000" b="0">
+                <a:solidFill>
+                  <a:srgbClr val="222222"/>
+                </a:solidFill>
+                <a:latin typeface="Calibri"/>
+              </a:rPr>
+              <a:t>Frequent fast rewrites on the move: flash/SSD (durable, no moving parts)</a:t>
+            </a:r>
+          </a:p>
+          <a:p>
+            <a:pPr/>
+            <a:r>
+              <a:rPr sz="2000" b="0">
+                <a:solidFill>
+                  <a:srgbClr val="222222"/>
+                </a:solidFill>
+                <a:latin typeface="Calibri"/>
+              </a:rPr>
+              <a:t>Bulk capacity on a budget: HDD; long-term archive at scale: tape</a:t>
+            </a:r>
+          </a:p>
+          <a:p>
+            <a:pPr/>
+            <a:r>
+              <a:rPr sz="2000" b="0">
+                <a:solidFill>
+                  <a:srgbClr val="222222"/>
+                </a:solidFill>
+                <a:latin typeface="Calibri"/>
+              </a:rPr>
+              <a:t>Always compare: say why the chosen medium beats a named alternative for THIS scenario</a:t>
+            </a:r>
+          </a:p>
+          <a:p>
+            <a:pPr/>
+            <a:r>
+              <a:rPr sz="1800" b="1">
+                <a:solidFill>
+                  <a:srgbClr val="B76E00"/>
+                </a:solidFill>
+                <a:latin typeface="Calibri"/>
+              </a:rPr>
+              <a:t>Answers that list generic pros and cons without applying them to the scenario cap at AO1 marks.</a:t>
             </a:r>
           </a:p>
         </p:txBody>
@@ -3643,7 +3664,7 @@
                 </a:solidFill>
                 <a:latin typeface="Calibri"/>
               </a:rPr>
-              <a:t>Exit ticket — answers</a:t>
+              <a:t>RAM and ROM</a:t>
             </a:r>
           </a:p>
         </p:txBody>
@@ -3670,72 +3691,969 @@
           </a:bodyPr>
           <a:lstStyle/>
           <a:p>
+            <a:pPr/>
+            <a:r>
+              <a:rPr sz="2000" b="0">
+                <a:solidFill>
+                  <a:srgbClr val="222222"/>
+                </a:solidFill>
+                <a:latin typeface="Calibri"/>
+              </a:rPr>
+              <a:t>RAM: volatile, read/write, holds the running programs and data the CPU is currently using</a:t>
+            </a:r>
+          </a:p>
+          <a:p>
+            <a:pPr/>
+            <a:r>
+              <a:rPr sz="2000" b="0">
+                <a:solidFill>
+                  <a:srgbClr val="222222"/>
+                </a:solidFill>
+                <a:latin typeface="Calibri"/>
+              </a:rPr>
+              <a:t>More RAM lets more programs run at once without resorting to virtual memory</a:t>
+            </a:r>
+          </a:p>
+          <a:p>
+            <a:pPr/>
+            <a:r>
+              <a:rPr sz="2000" b="0">
+                <a:solidFill>
+                  <a:srgbClr val="222222"/>
+                </a:solidFill>
+                <a:latin typeface="Calibri"/>
+              </a:rPr>
+              <a:t>ROM: non-volatile, normally read-only, holds the bootstrap loader and BIOS firmware</a:t>
+            </a:r>
+          </a:p>
+          <a:p>
+            <a:pPr/>
+            <a:r>
+              <a:rPr sz="2000" b="0">
+                <a:solidFill>
+                  <a:srgbClr val="222222"/>
+                </a:solidFill>
+                <a:latin typeface="Calibri"/>
+              </a:rPr>
+              <a:t>The bootstrap code in ROM starts the computer and loads the OS from secondary storage into RAM</a:t>
+            </a:r>
+          </a:p>
+        </p:txBody>
+      </p:sp>
+    </p:spTree>
+  </p:cSld>
+  <p:clrMapOvr>
+    <a:masterClrMapping/>
+  </p:clrMapOvr>
+</p:sld>
+</file>
+
+<file path=ppt/slides/slide14.xml><?xml version="1.0" encoding="utf-8"?>
+<p:sld xmlns:a="http://schemas.openxmlformats.org/drawingml/2006/main" xmlns:p="http://schemas.openxmlformats.org/presentationml/2006/main" xmlns:r="http://schemas.openxmlformats.org/officeDocument/2006/relationships">
+  <p:cSld>
+    <p:bg>
+      <p:bgPr>
+        <a:solidFill>
+          <a:srgbClr val="FFFFFF"/>
+        </a:solidFill>
+        <a:effectLst/>
+      </p:bgPr>
+    </p:bg>
+    <p:spTree>
+      <p:nvGrpSpPr>
+        <p:cNvPr id="1" name=""/>
+        <p:cNvGrpSpPr/>
+        <p:nvPr/>
+      </p:nvGrpSpPr>
+      <p:grpSpPr/>
+      <p:sp>
+        <p:nvSpPr>
+          <p:cNvPr id="2" name="TextBox 1"/>
+          <p:cNvSpPr txBox="1"/>
+          <p:nvPr/>
+        </p:nvSpPr>
+        <p:spPr>
+          <a:xfrm>
+            <a:off x="548640" y="274320"/>
+            <a:ext cx="11064240" cy="822960"/>
+          </a:xfrm>
+          <a:prstGeom prst="rect">
+            <a:avLst/>
+          </a:prstGeom>
+          <a:noFill/>
+        </p:spPr>
+        <p:txBody>
+          <a:bodyPr wrap="square">
+            <a:spAutoFit/>
+          </a:bodyPr>
+          <a:lstStyle/>
+          <a:p>
+            <a:r>
+              <a:rPr sz="3000" b="1" i="0">
+                <a:solidFill>
+                  <a:srgbClr val="2B6CB0"/>
+                </a:solidFill>
+                <a:latin typeface="Calibri"/>
+              </a:rPr>
+              <a:t>Virtual memory</a:t>
+            </a:r>
+          </a:p>
+        </p:txBody>
+      </p:sp>
+      <p:sp>
+        <p:nvSpPr>
+          <p:cNvPr id="3" name="TextBox 2"/>
+          <p:cNvSpPr txBox="1"/>
+          <p:nvPr/>
+        </p:nvSpPr>
+        <p:spPr>
+          <a:xfrm>
+            <a:off x="640080" y="1280160"/>
+            <a:ext cx="10881360" cy="5120640"/>
+          </a:xfrm>
+          <a:prstGeom prst="rect">
+            <a:avLst/>
+          </a:prstGeom>
+          <a:noFill/>
+        </p:spPr>
+        <p:txBody>
+          <a:bodyPr wrap="square">
+            <a:spAutoFit/>
+          </a:bodyPr>
+          <a:lstStyle/>
+          <a:p>
+            <a:pPr/>
+            <a:r>
+              <a:rPr sz="2000" b="0">
+                <a:solidFill>
+                  <a:srgbClr val="222222"/>
+                </a:solidFill>
+                <a:latin typeface="Calibri"/>
+              </a:rPr>
+              <a:t>When RAM is full, the OS moves less-recently-used pages to a paging/swap file on secondary storage</a:t>
+            </a:r>
+          </a:p>
+          <a:p>
+            <a:pPr/>
+            <a:r>
+              <a:rPr sz="2000" b="0">
+                <a:solidFill>
+                  <a:srgbClr val="222222"/>
+                </a:solidFill>
+                <a:latin typeface="Calibri"/>
+              </a:rPr>
+              <a:t>This lets more or larger programs run than physical RAM alone would allow</a:t>
+            </a:r>
+          </a:p>
+          <a:p>
+            <a:pPr/>
+            <a:r>
+              <a:rPr sz="2000" b="0">
+                <a:solidFill>
+                  <a:srgbClr val="222222"/>
+                </a:solidFill>
+                <a:latin typeface="Calibri"/>
+              </a:rPr>
+              <a:t>Disk access is far slower than RAM, so heavy paging degrades performance</a:t>
+            </a:r>
+          </a:p>
+          <a:p>
+            <a:pPr/>
+            <a:r>
+              <a:rPr sz="2000" b="0">
+                <a:solidFill>
+                  <a:srgbClr val="222222"/>
+                </a:solidFill>
+                <a:latin typeface="Calibri"/>
+              </a:rPr>
+              <a:t>Excessive swapping is disk thrashing: the system spends its time paging, not working</a:t>
+            </a:r>
+          </a:p>
+          <a:p>
+            <a:pPr/>
+            <a:r>
+              <a:rPr sz="1800" b="1">
+                <a:solidFill>
+                  <a:srgbClr val="B76E00"/>
+                </a:solidFill>
+                <a:latin typeface="Calibri"/>
+              </a:rPr>
+              <a:t>Virtual memory does NOT add extra RAM — it borrows secondary storage to act as if it were RAM.</a:t>
+            </a:r>
+          </a:p>
+        </p:txBody>
+      </p:sp>
+    </p:spTree>
+  </p:cSld>
+  <p:clrMapOvr>
+    <a:masterClrMapping/>
+  </p:clrMapOvr>
+</p:sld>
+</file>
+
+<file path=ppt/slides/slide15.xml><?xml version="1.0" encoding="utf-8"?>
+<p:sld xmlns:a="http://schemas.openxmlformats.org/drawingml/2006/main" xmlns:p="http://schemas.openxmlformats.org/presentationml/2006/main" xmlns:r="http://schemas.openxmlformats.org/officeDocument/2006/relationships">
+  <p:cSld>
+    <p:bg>
+      <p:bgPr>
+        <a:solidFill>
+          <a:srgbClr val="FFFFFF"/>
+        </a:solidFill>
+        <a:effectLst/>
+      </p:bgPr>
+    </p:bg>
+    <p:spTree>
+      <p:nvGrpSpPr>
+        <p:cNvPr id="1" name=""/>
+        <p:cNvGrpSpPr/>
+        <p:nvPr/>
+      </p:nvGrpSpPr>
+      <p:grpSpPr/>
+      <p:sp>
+        <p:nvSpPr>
+          <p:cNvPr id="2" name="TextBox 1"/>
+          <p:cNvSpPr txBox="1"/>
+          <p:nvPr/>
+        </p:nvSpPr>
+        <p:spPr>
+          <a:xfrm>
+            <a:off x="548640" y="274320"/>
+            <a:ext cx="11064240" cy="822960"/>
+          </a:xfrm>
+          <a:prstGeom prst="rect">
+            <a:avLst/>
+          </a:prstGeom>
+          <a:noFill/>
+        </p:spPr>
+        <p:txBody>
+          <a:bodyPr wrap="square">
+            <a:spAutoFit/>
+          </a:bodyPr>
+          <a:lstStyle/>
+          <a:p>
+            <a:r>
+              <a:rPr sz="3000" b="1" i="0">
+                <a:solidFill>
+                  <a:srgbClr val="2B6CB0"/>
+                </a:solidFill>
+                <a:latin typeface="Calibri"/>
+              </a:rPr>
+              <a:t>Virtual (cloud) storage</a:t>
+            </a:r>
+          </a:p>
+        </p:txBody>
+      </p:sp>
+      <p:sp>
+        <p:nvSpPr>
+          <p:cNvPr id="3" name="TextBox 2"/>
+          <p:cNvSpPr txBox="1"/>
+          <p:nvPr/>
+        </p:nvSpPr>
+        <p:spPr>
+          <a:xfrm>
+            <a:off x="640080" y="1280160"/>
+            <a:ext cx="10881360" cy="5120640"/>
+          </a:xfrm>
+          <a:prstGeom prst="rect">
+            <a:avLst/>
+          </a:prstGeom>
+          <a:noFill/>
+        </p:spPr>
+        <p:txBody>
+          <a:bodyPr wrap="square">
+            <a:spAutoFit/>
+          </a:bodyPr>
+          <a:lstStyle/>
+          <a:p>
+            <a:pPr/>
+            <a:r>
+              <a:rPr sz="2000" b="0">
+                <a:solidFill>
+                  <a:srgbClr val="222222"/>
+                </a:solidFill>
+                <a:latin typeface="Calibri"/>
+              </a:rPr>
+              <a:t>Files stored on remote servers and accessed over a network or the internet</a:t>
+            </a:r>
+          </a:p>
+          <a:p>
+            <a:pPr/>
+            <a:r>
+              <a:rPr sz="2000" b="0">
+                <a:solidFill>
+                  <a:srgbClr val="222222"/>
+                </a:solidFill>
+                <a:latin typeface="Calibri"/>
+              </a:rPr>
+              <a:t>Benefits: access from anywhere, easy scaling, sharing, off-site backup, no hardware to maintain</a:t>
+            </a:r>
+          </a:p>
+          <a:p>
+            <a:pPr/>
+            <a:r>
+              <a:rPr sz="2000" b="0">
+                <a:solidFill>
+                  <a:srgbClr val="222222"/>
+                </a:solidFill>
+                <a:latin typeface="Calibri"/>
+              </a:rPr>
+              <a:t>Drawbacks: needs an internet connection, ongoing subscription cost, data held by a third party (security/privacy)</a:t>
+            </a:r>
+          </a:p>
+          <a:p>
+            <a:pPr/>
+            <a:r>
+              <a:rPr sz="2000" b="0">
+                <a:solidFill>
+                  <a:srgbClr val="222222"/>
+                </a:solidFill>
+                <a:latin typeface="Calibri"/>
+              </a:rPr>
+              <a:t>Keep the two virtuals separate: virtual memory extends RAM; virtual storage replaces local disks</a:t>
+            </a:r>
+          </a:p>
+        </p:txBody>
+      </p:sp>
+    </p:spTree>
+  </p:cSld>
+  <p:clrMapOvr>
+    <a:masterClrMapping/>
+  </p:clrMapOvr>
+</p:sld>
+</file>
+
+<file path=ppt/slides/slide16.xml><?xml version="1.0" encoding="utf-8"?>
+<p:sld xmlns:a="http://schemas.openxmlformats.org/drawingml/2006/main" xmlns:p="http://schemas.openxmlformats.org/presentationml/2006/main" xmlns:r="http://schemas.openxmlformats.org/officeDocument/2006/relationships">
+  <p:cSld>
+    <p:bg>
+      <p:bgPr>
+        <a:solidFill>
+          <a:srgbClr val="FFFFFF"/>
+        </a:solidFill>
+        <a:effectLst/>
+      </p:bgPr>
+    </p:bg>
+    <p:spTree>
+      <p:nvGrpSpPr>
+        <p:cNvPr id="1" name=""/>
+        <p:cNvGrpSpPr/>
+        <p:nvPr/>
+      </p:nvGrpSpPr>
+      <p:grpSpPr/>
+      <p:sp>
+        <p:nvSpPr>
+          <p:cNvPr id="2" name="TextBox 1"/>
+          <p:cNvSpPr txBox="1"/>
+          <p:nvPr/>
+        </p:nvSpPr>
+        <p:spPr>
+          <a:xfrm>
+            <a:off x="548640" y="274320"/>
+            <a:ext cx="11064240" cy="822960"/>
+          </a:xfrm>
+          <a:prstGeom prst="rect">
+            <a:avLst/>
+          </a:prstGeom>
+          <a:noFill/>
+        </p:spPr>
+        <p:txBody>
+          <a:bodyPr wrap="square">
+            <a:spAutoFit/>
+          </a:bodyPr>
+          <a:lstStyle/>
+          <a:p>
+            <a:r>
+              <a:rPr sz="3000" b="1" i="0">
+                <a:solidFill>
+                  <a:srgbClr val="2B6CB0"/>
+                </a:solidFill>
+                <a:latin typeface="Calibri"/>
+              </a:rPr>
+              <a:t>Worked example 1</a:t>
+            </a:r>
+          </a:p>
+        </p:txBody>
+      </p:sp>
+      <p:sp>
+        <p:nvSpPr>
+          <p:cNvPr id="3" name="TextBox 2"/>
+          <p:cNvSpPr txBox="1"/>
+          <p:nvPr/>
+        </p:nvSpPr>
+        <p:spPr>
+          <a:xfrm>
+            <a:off x="640080" y="1280160"/>
+            <a:ext cx="10881360" cy="5120640"/>
+          </a:xfrm>
+          <a:prstGeom prst="rect">
+            <a:avLst/>
+          </a:prstGeom>
+          <a:noFill/>
+        </p:spPr>
+        <p:txBody>
+          <a:bodyPr wrap="square">
+            <a:spAutoFit/>
+          </a:bodyPr>
+          <a:lstStyle/>
+          <a:p>
+            <a:pPr/>
             <a:r>
               <a:rPr sz="2200" b="1">
                 <a:solidFill>
-                  <a:srgbClr val="222222"/>
-                </a:solidFill>
-                <a:latin typeface="Calibri"/>
-              </a:rPr>
-              <a:t>1. Why is flash/SSD storage more durable than a magnetic HDD?</a:t>
+                  <a:srgbClr val="2B6CB0"/>
+                </a:solidFill>
+                <a:latin typeface="Calibri"/>
+              </a:rPr>
+              <a:t>Recommending a storage device with full justification</a:t>
             </a:r>
           </a:p>
           <a:p>
             <a:pPr lvl="1"/>
             <a:r>
-              <a:rPr sz="1800" i="1">
+              <a:rPr sz="1900" b="0">
+                <a:solidFill>
+                  <a:srgbClr val="222222"/>
+                </a:solidFill>
+                <a:latin typeface="Calibri"/>
+              </a:rPr>
+              <a:t>1. Scenario: portable storage for large video files, carried between sites, frequently rewritten, needing fast transfer and durability</a:t>
+            </a:r>
+          </a:p>
+          <a:p>
+            <a:pPr lvl="1"/>
+            <a:r>
+              <a:rPr sz="1900" b="0">
+                <a:solidFill>
+                  <a:srgbClr val="222222"/>
+                </a:solidFill>
+                <a:latin typeface="Calibri"/>
+              </a:rPr>
+              <a:t>2. Step 1, list the requirements: portable, large capacity, fast transfer, frequently rewritten, durable</a:t>
+            </a:r>
+          </a:p>
+          <a:p>
+            <a:pPr lvl="1"/>
+            <a:r>
+              <a:rPr sz="1900" b="0">
+                <a:solidFill>
+                  <a:srgbClr val="222222"/>
+                </a:solidFill>
+                <a:latin typeface="Calibri"/>
+              </a:rPr>
+              <a:t>3. Step 2, recommend: an external SSD (flash storage)</a:t>
+            </a:r>
+          </a:p>
+          <a:p>
+            <a:pPr lvl="1"/>
+            <a:r>
+              <a:rPr sz="1900" b="0">
+                <a:solidFill>
+                  <a:srgbClr val="222222"/>
+                </a:solidFill>
+                <a:latin typeface="Calibri"/>
+              </a:rPr>
+              <a:t>4. Step 3, justify against each requirement: small and light so portable; fast transfer suits large video files; easily rewritable; no moving parts so it survives being carried</a:t>
+            </a:r>
+          </a:p>
+          <a:p>
+            <a:pPr lvl="1"/>
+            <a:r>
+              <a:rPr sz="1900" b="0">
+                <a:solidFill>
+                  <a:srgbClr val="222222"/>
+                </a:solidFill>
+                <a:latin typeface="Calibri"/>
+              </a:rPr>
+              <a:t>5. Step 4, compare and reject alternatives: an HDD is cheaper per GB but its moving parts are fragile in transit; optical discs are slow and far too small — so flash best fits the stated needs</a:t>
+            </a:r>
+          </a:p>
+        </p:txBody>
+      </p:sp>
+    </p:spTree>
+  </p:cSld>
+  <p:clrMapOvr>
+    <a:masterClrMapping/>
+  </p:clrMapOvr>
+</p:sld>
+</file>
+
+<file path=ppt/slides/slide17.xml><?xml version="1.0" encoding="utf-8"?>
+<p:sld xmlns:a="http://schemas.openxmlformats.org/drawingml/2006/main" xmlns:p="http://schemas.openxmlformats.org/presentationml/2006/main" xmlns:r="http://schemas.openxmlformats.org/officeDocument/2006/relationships">
+  <p:cSld>
+    <p:bg>
+      <p:bgPr>
+        <a:solidFill>
+          <a:srgbClr val="FFFFFF"/>
+        </a:solidFill>
+        <a:effectLst/>
+      </p:bgPr>
+    </p:bg>
+    <p:spTree>
+      <p:nvGrpSpPr>
+        <p:cNvPr id="1" name=""/>
+        <p:cNvGrpSpPr/>
+        <p:nvPr/>
+      </p:nvGrpSpPr>
+      <p:grpSpPr/>
+      <p:sp>
+        <p:nvSpPr>
+          <p:cNvPr id="2" name="TextBox 1"/>
+          <p:cNvSpPr txBox="1"/>
+          <p:nvPr/>
+        </p:nvSpPr>
+        <p:spPr>
+          <a:xfrm>
+            <a:off x="548640" y="274320"/>
+            <a:ext cx="11064240" cy="822960"/>
+          </a:xfrm>
+          <a:prstGeom prst="rect">
+            <a:avLst/>
+          </a:prstGeom>
+          <a:noFill/>
+        </p:spPr>
+        <p:txBody>
+          <a:bodyPr wrap="square">
+            <a:spAutoFit/>
+          </a:bodyPr>
+          <a:lstStyle/>
+          <a:p>
+            <a:r>
+              <a:rPr sz="3000" b="1" i="0">
+                <a:solidFill>
+                  <a:srgbClr val="2B6CB0"/>
+                </a:solidFill>
+                <a:latin typeface="Calibri"/>
+              </a:rPr>
+              <a:t>Worked example 2</a:t>
+            </a:r>
+          </a:p>
+        </p:txBody>
+      </p:sp>
+      <p:sp>
+        <p:nvSpPr>
+          <p:cNvPr id="3" name="TextBox 2"/>
+          <p:cNvSpPr txBox="1"/>
+          <p:nvPr/>
+        </p:nvSpPr>
+        <p:spPr>
+          <a:xfrm>
+            <a:off x="640080" y="1280160"/>
+            <a:ext cx="10881360" cy="5120640"/>
+          </a:xfrm>
+          <a:prstGeom prst="rect">
+            <a:avLst/>
+          </a:prstGeom>
+          <a:noFill/>
+        </p:spPr>
+        <p:txBody>
+          <a:bodyPr wrap="square">
+            <a:spAutoFit/>
+          </a:bodyPr>
+          <a:lstStyle/>
+          <a:p>
+            <a:pPr/>
+            <a:r>
+              <a:rPr sz="2200" b="1">
+                <a:solidFill>
+                  <a:srgbClr val="2B6CB0"/>
+                </a:solidFill>
+                <a:latin typeface="Calibri"/>
+              </a:rPr>
+              <a:t>Costing an archive: tape versus cloud for 60 TB over 8 years</a:t>
+            </a:r>
+          </a:p>
+          <a:p>
+            <a:pPr lvl="1"/>
+            <a:r>
+              <a:rPr sz="1900" b="0">
+                <a:solidFill>
+                  <a:srgbClr val="222222"/>
+                </a:solidFill>
+                <a:latin typeface="Calibri"/>
+              </a:rPr>
+              <a:t>1. A hospital must keep 60 TB of scans off-site for 8 years; catalogue prices: 12 TB tape cartridge 40 pounds, tape drive 1,500 pounds, cloud 8 pounds per TB per month</a:t>
+            </a:r>
+          </a:p>
+          <a:p>
+            <a:pPr lvl="1"/>
+            <a:r>
+              <a:rPr sz="1900" b="0">
+                <a:solidFill>
+                  <a:srgbClr val="222222"/>
+                </a:solidFill>
+                <a:latin typeface="Calibri"/>
+              </a:rPr>
+              <a:t>2. Tape: 60 / 12 = 5 cartridges; 5 x 40 = 200 pounds, plus the drive 1,500 pounds = 1,700 pounds total</a:t>
+            </a:r>
+          </a:p>
+          <a:p>
+            <a:pPr lvl="1"/>
+            <a:r>
+              <a:rPr sz="1900" b="0">
+                <a:solidFill>
+                  <a:srgbClr val="222222"/>
+                </a:solidFill>
+                <a:latin typeface="Calibri"/>
+              </a:rPr>
+              <a:t>3. Cloud: 60 TB x 8 pounds = 480 pounds per month; 480 x 12 = 5,760 pounds per year; x 8 years = 46,080 pounds</a:t>
+            </a:r>
+          </a:p>
+          <a:p>
+            <a:pPr lvl="1"/>
+            <a:r>
+              <a:rPr sz="1900" b="0">
+                <a:solidFill>
+                  <a:srgbClr val="222222"/>
+                </a:solidFill>
+                <a:latin typeface="Calibri"/>
+              </a:rPr>
+              <a:t>4. Tape also offers a long shelf life, and serial access is acceptable because archives are rarely read</a:t>
+            </a:r>
+          </a:p>
+          <a:p>
+            <a:pPr lvl="1"/>
+            <a:r>
+              <a:rPr sz="1900" b="0">
+                <a:solidFill>
+                  <a:srgbClr val="222222"/>
+                </a:solidFill>
+                <a:latin typeface="Calibri"/>
+              </a:rPr>
+              <a:t>5. Conclusion: tape wins on cost by a factor of about 27; cloud is only defensible if scans must be instantly retrievable from anywhere</a:t>
+            </a:r>
+          </a:p>
+        </p:txBody>
+      </p:sp>
+    </p:spTree>
+  </p:cSld>
+  <p:clrMapOvr>
+    <a:masterClrMapping/>
+  </p:clrMapOvr>
+</p:sld>
+</file>
+
+<file path=ppt/slides/slide18.xml><?xml version="1.0" encoding="utf-8"?>
+<p:sld xmlns:a="http://schemas.openxmlformats.org/drawingml/2006/main" xmlns:p="http://schemas.openxmlformats.org/presentationml/2006/main" xmlns:r="http://schemas.openxmlformats.org/officeDocument/2006/relationships">
+  <p:cSld>
+    <p:bg>
+      <p:bgPr>
+        <a:solidFill>
+          <a:srgbClr val="FFFFFF"/>
+        </a:solidFill>
+        <a:effectLst/>
+      </p:bgPr>
+    </p:bg>
+    <p:spTree>
+      <p:nvGrpSpPr>
+        <p:cNvPr id="1" name=""/>
+        <p:cNvGrpSpPr/>
+        <p:nvPr/>
+      </p:nvGrpSpPr>
+      <p:grpSpPr/>
+      <p:sp>
+        <p:nvSpPr>
+          <p:cNvPr id="2" name="TextBox 1"/>
+          <p:cNvSpPr txBox="1"/>
+          <p:nvPr/>
+        </p:nvSpPr>
+        <p:spPr>
+          <a:xfrm>
+            <a:off x="548640" y="274320"/>
+            <a:ext cx="11064240" cy="822960"/>
+          </a:xfrm>
+          <a:prstGeom prst="rect">
+            <a:avLst/>
+          </a:prstGeom>
+          <a:noFill/>
+        </p:spPr>
+        <p:txBody>
+          <a:bodyPr wrap="square">
+            <a:spAutoFit/>
+          </a:bodyPr>
+          <a:lstStyle/>
+          <a:p>
+            <a:r>
+              <a:rPr sz="3000" b="1" i="0">
+                <a:solidFill>
+                  <a:srgbClr val="2B6CB0"/>
+                </a:solidFill>
+                <a:latin typeface="Calibri"/>
+              </a:rPr>
+              <a:t>Worked example 3</a:t>
+            </a:r>
+          </a:p>
+        </p:txBody>
+      </p:sp>
+      <p:sp>
+        <p:nvSpPr>
+          <p:cNvPr id="3" name="TextBox 2"/>
+          <p:cNvSpPr txBox="1"/>
+          <p:nvPr/>
+        </p:nvSpPr>
+        <p:spPr>
+          <a:xfrm>
+            <a:off x="640080" y="1280160"/>
+            <a:ext cx="10881360" cy="5120640"/>
+          </a:xfrm>
+          <a:prstGeom prst="rect">
+            <a:avLst/>
+          </a:prstGeom>
+          <a:noFill/>
+        </p:spPr>
+        <p:txBody>
+          <a:bodyPr wrap="square">
+            <a:spAutoFit/>
+          </a:bodyPr>
+          <a:lstStyle/>
+          <a:p>
+            <a:pPr/>
+            <a:r>
+              <a:rPr sz="2200" b="1">
+                <a:solidFill>
+                  <a:srgbClr val="2B6CB0"/>
+                </a:solidFill>
+                <a:latin typeface="Calibri"/>
+              </a:rPr>
+              <a:t>Tracing virtual memory when RAM fills up</a:t>
+            </a:r>
+          </a:p>
+          <a:p>
+            <a:pPr lvl="1"/>
+            <a:r>
+              <a:rPr sz="1900" b="0">
+                <a:solidFill>
+                  <a:srgbClr val="222222"/>
+                </a:solidFill>
+                <a:latin typeface="Calibri"/>
+              </a:rPr>
+              <a:t>1. A laptop has 8 GB of RAM; the user opens programs needing 10 GB in total</a:t>
+            </a:r>
+          </a:p>
+          <a:p>
+            <a:pPr lvl="1"/>
+            <a:r>
+              <a:rPr sz="1900" b="0">
+                <a:solidFill>
+                  <a:srgbClr val="222222"/>
+                </a:solidFill>
+                <a:latin typeface="Calibri"/>
+              </a:rPr>
+              <a:t>2. Step 1: the OS identifies pages of RAM that have not been used recently</a:t>
+            </a:r>
+          </a:p>
+          <a:p>
+            <a:pPr lvl="1"/>
+            <a:r>
+              <a:rPr sz="1900" b="0">
+                <a:solidFill>
+                  <a:srgbClr val="222222"/>
+                </a:solidFill>
+                <a:latin typeface="Calibri"/>
+              </a:rPr>
+              <a:t>3. Step 2: those pages are written out to the paging (swap) file on the SSD or HDD, freeing physical RAM</a:t>
+            </a:r>
+          </a:p>
+          <a:p>
+            <a:pPr lvl="1"/>
+            <a:r>
+              <a:rPr sz="1900" b="0">
+                <a:solidFill>
+                  <a:srgbClr val="222222"/>
+                </a:solidFill>
+                <a:latin typeface="Calibri"/>
+              </a:rPr>
+              <a:t>4. Step 3: when a swapped-out page is needed again, it is read back into RAM, and another page may be evicted to make room</a:t>
+            </a:r>
+          </a:p>
+          <a:p>
+            <a:pPr lvl="1"/>
+            <a:r>
+              <a:rPr sz="1900" b="0">
+                <a:solidFill>
+                  <a:srgbClr val="222222"/>
+                </a:solidFill>
+                <a:latin typeface="Calibri"/>
+              </a:rPr>
+              <a:t>5. Step 4: because disk is far slower than RAM, each swap costs time; if the shortfall grows, constant swapping (thrashing) leaves the machine unresponsive</a:t>
+            </a:r>
+          </a:p>
+          <a:p>
+            <a:pPr lvl="1"/>
+            <a:r>
+              <a:rPr sz="1900" b="0">
+                <a:solidFill>
+                  <a:srgbClr val="222222"/>
+                </a:solidFill>
+                <a:latin typeface="Calibri"/>
+              </a:rPr>
+              <a:t>6. Fix: install more physical RAM, or run fewer programs at once</a:t>
+            </a:r>
+          </a:p>
+        </p:txBody>
+      </p:sp>
+    </p:spTree>
+  </p:cSld>
+  <p:clrMapOvr>
+    <a:masterClrMapping/>
+  </p:clrMapOvr>
+</p:sld>
+</file>
+
+<file path=ppt/slides/slide19.xml><?xml version="1.0" encoding="utf-8"?>
+<p:sld xmlns:a="http://schemas.openxmlformats.org/drawingml/2006/main" xmlns:p="http://schemas.openxmlformats.org/presentationml/2006/main" xmlns:r="http://schemas.openxmlformats.org/officeDocument/2006/relationships">
+  <p:cSld>
+    <p:bg>
+      <p:bgPr>
+        <a:solidFill>
+          <a:srgbClr val="FFFFFF"/>
+        </a:solidFill>
+        <a:effectLst/>
+      </p:bgPr>
+    </p:bg>
+    <p:spTree>
+      <p:nvGrpSpPr>
+        <p:cNvPr id="1" name=""/>
+        <p:cNvGrpSpPr/>
+        <p:nvPr/>
+      </p:nvGrpSpPr>
+      <p:grpSpPr/>
+      <p:sp>
+        <p:nvSpPr>
+          <p:cNvPr id="2" name="TextBox 1"/>
+          <p:cNvSpPr txBox="1"/>
+          <p:nvPr/>
+        </p:nvSpPr>
+        <p:spPr>
+          <a:xfrm>
+            <a:off x="548640" y="274320"/>
+            <a:ext cx="11064240" cy="822960"/>
+          </a:xfrm>
+          <a:prstGeom prst="rect">
+            <a:avLst/>
+          </a:prstGeom>
+          <a:noFill/>
+        </p:spPr>
+        <p:txBody>
+          <a:bodyPr wrap="square">
+            <a:spAutoFit/>
+          </a:bodyPr>
+          <a:lstStyle/>
+          <a:p>
+            <a:r>
+              <a:rPr sz="3000" b="1" i="0">
+                <a:solidFill>
+                  <a:srgbClr val="2B6CB0"/>
+                </a:solidFill>
+                <a:latin typeface="Calibri"/>
+              </a:rPr>
+              <a:t>Activity 1</a:t>
+            </a:r>
+          </a:p>
+        </p:txBody>
+      </p:sp>
+      <p:sp>
+        <p:nvSpPr>
+          <p:cNvPr id="3" name="TextBox 2"/>
+          <p:cNvSpPr txBox="1"/>
+          <p:nvPr/>
+        </p:nvSpPr>
+        <p:spPr>
+          <a:xfrm>
+            <a:off x="640080" y="1280160"/>
+            <a:ext cx="10881360" cy="5120640"/>
+          </a:xfrm>
+          <a:prstGeom prst="rect">
+            <a:avLst/>
+          </a:prstGeom>
+          <a:noFill/>
+        </p:spPr>
+        <p:txBody>
+          <a:bodyPr wrap="square">
+            <a:spAutoFit/>
+          </a:bodyPr>
+          <a:lstStyle/>
+          <a:p>
+            <a:pPr/>
+            <a:r>
+              <a:rPr sz="2200" b="1">
+                <a:solidFill>
+                  <a:srgbClr val="2B6CB0"/>
+                </a:solidFill>
+                <a:latin typeface="Calibri"/>
+              </a:rPr>
+              <a:t>Storage Shopping Task: Spend the Budget  (20 min)</a:t>
+            </a:r>
+          </a:p>
+          <a:p>
+            <a:pPr lvl="1"/>
+            <a:r>
+              <a:rPr sz="2000" b="0">
+                <a:solidFill>
+                  <a:srgbClr val="222222"/>
+                </a:solidFill>
+                <a:latin typeface="Calibri"/>
+              </a:rPr>
+              <a:t>Project the catalogue: 4 TB HDD 70 pounds; 1 TB SATA SSD 55 pounds; 2 TB NVMe SSD 120 pounds; 128 GB USB flash drive 12 pounds; 25 GB Blu-ray discs 1 pound each (drive 60 pounds); 12 TB LTO tape 40 pounds (drive 1,500 pounds); cloud 8 pounds per TB per month</a:t>
+            </a:r>
+          </a:p>
+          <a:p>
+            <a:pPr lvl="1"/>
+            <a:r>
+              <a:rPr sz="2000" b="0">
+                <a:solidFill>
+                  <a:srgbClr val="222222"/>
+                </a:solidFill>
+                <a:latin typeface="Calibri"/>
+              </a:rPr>
+              <a:t>Groups of three act as IT consultants: (a) video-editing freelancer, 200 pounds, fast scratch space plus archive; (b) hospital, 3,000 pounds, 60 TB off-site for 8 years; (c) school, 150 pounds, distributing a 4 GB pack to 30 staff with no optical drives; (d) wildlife charity, 100 pounds, camera-trap storage in a hot, vibration-prone hide</a:t>
+            </a:r>
+          </a:p>
+          <a:p>
+            <a:pPr lvl="1"/>
+            <a:r>
+              <a:rPr sz="2000" b="0">
+                <a:solidFill>
+                  <a:srgbClr val="222222"/>
+                </a:solidFill>
+                <a:latin typeface="Calibri"/>
+              </a:rPr>
+              <a:t>Groups pick devices within budget and write a two-sentence justification per choice linking a characteristic to a stated requirement</a:t>
+            </a:r>
+          </a:p>
+          <a:p>
+            <a:pPr lvl="1"/>
+            <a:r>
+              <a:rPr sz="2000" b="0">
+                <a:solidFill>
+                  <a:srgbClr val="222222"/>
+                </a:solidFill>
+                <a:latin typeface="Calibri"/>
+              </a:rPr>
+              <a:t>Groups pitch to another group acting as the sceptical client, who must ask one why-not-X-instead question</a:t>
+            </a:r>
+          </a:p>
+          <a:p>
+            <a:pPr lvl="1"/>
+            <a:r>
+              <a:rPr sz="2000" b="0">
+                <a:solidFill>
+                  <a:srgbClr val="222222"/>
+                </a:solidFill>
+                <a:latin typeface="Calibri"/>
+              </a:rPr>
+              <a:t>Debrief: praise pitches that compared alternatives (whereas...) over pitches that listed generic pros</a:t>
+            </a:r>
+          </a:p>
+          <a:p>
+            <a:pPr/>
+            <a:r>
+              <a:rPr sz="1800" b="0">
                 <a:solidFill>
                   <a:srgbClr val="B76E00"/>
                 </a:solidFill>
                 <a:latin typeface="Calibri"/>
               </a:rPr>
-              <a:t>Answer: It has no moving parts, so it is shock-resistant as well as faster, silent and lower power.</a:t>
-            </a:r>
-          </a:p>
-          <a:p>
-            <a:r>
-              <a:rPr sz="2200" b="1">
-                <a:solidFill>
-                  <a:srgbClr val="222222"/>
-                </a:solidFill>
-                <a:latin typeface="Calibri"/>
-              </a:rPr>
-              <a:t>2. What does volatile mean, and which of RAM/ROM is volatile?</a:t>
-            </a:r>
-          </a:p>
-          <a:p>
-            <a:pPr lvl="1"/>
-            <a:r>
-              <a:rPr sz="1800" i="1">
-                <a:solidFill>
-                  <a:srgbClr val="B76E00"/>
-                </a:solidFill>
-                <a:latin typeface="Calibri"/>
-              </a:rPr>
-              <a:t>Answer: Volatile means contents are lost when power is removed; RAM is volatile, ROM is non-volatile.</a:t>
-            </a:r>
-          </a:p>
-          <a:p>
-            <a:r>
-              <a:rPr sz="2200" b="1">
-                <a:solidFill>
-                  <a:srgbClr val="222222"/>
-                </a:solidFill>
-                <a:latin typeface="Calibri"/>
-              </a:rPr>
-              <a:t>3. Define disk thrashing.</a:t>
-            </a:r>
-          </a:p>
-          <a:p>
-            <a:pPr lvl="1"/>
-            <a:r>
-              <a:rPr sz="1800" i="1">
-                <a:solidFill>
-                  <a:srgbClr val="B76E00"/>
-                </a:solidFill>
-                <a:latin typeface="Calibri"/>
-              </a:rPr>
-              <a:t>Answer: When excessive paging means the system spends most of its time swapping pages in and out of disk rather than doing useful work.</a:t>
+              <a:t>Stretch: Curveball mid-pitch: the hospital now needs any scan retrievable within one minute — defend or revise (tape's serial access now fails).</a:t>
             </a:r>
           </a:p>
         </p:txBody>
@@ -3842,7 +4760,7 @@
                 </a:solidFill>
                 <a:latin typeface="Calibri"/>
               </a:rPr>
-              <a:t>Describe how magnetic, flash/solid-state and optical storage work and compare their pros and cons</a:t>
+              <a:t>I can justify a choice of input or output device for a given scenario, linking characteristics to requirements</a:t>
             </a:r>
           </a:p>
           <a:p>
@@ -3854,7 +4772,7 @@
                 </a:solidFill>
                 <a:latin typeface="Calibri"/>
               </a:rPr>
-              <a:t>Explain the differences between RAM and ROM and how virtual memory and virtual/cloud storage work</a:t>
+              <a:t>I can describe how magnetic, flash and optical storage work and compare their suitability for different uses</a:t>
             </a:r>
           </a:p>
           <a:p>
@@ -3866,7 +4784,1477 @@
                 </a:solidFill>
                 <a:latin typeface="Calibri"/>
               </a:rPr>
-              <a:t>Apply device characteristics to justify suitable input, output and storage choices for a given scenario</a:t>
+              <a:t>I can explain the differences between RAM and ROM, including volatility and their contents</a:t>
+            </a:r>
+          </a:p>
+          <a:p>
+            <a:pPr lvl="1"/>
+            <a:r>
+              <a:rPr sz="2200" b="0">
+                <a:solidFill>
+                  <a:srgbClr val="222222"/>
+                </a:solidFill>
+                <a:latin typeface="Calibri"/>
+              </a:rPr>
+              <a:t>I can explain virtual storage, distinguishing virtual memory from virtual (cloud) storage</a:t>
+            </a:r>
+          </a:p>
+        </p:txBody>
+      </p:sp>
+    </p:spTree>
+  </p:cSld>
+  <p:clrMapOvr>
+    <a:masterClrMapping/>
+  </p:clrMapOvr>
+</p:sld>
+</file>
+
+<file path=ppt/slides/slide20.xml><?xml version="1.0" encoding="utf-8"?>
+<p:sld xmlns:a="http://schemas.openxmlformats.org/drawingml/2006/main" xmlns:p="http://schemas.openxmlformats.org/presentationml/2006/main" xmlns:r="http://schemas.openxmlformats.org/officeDocument/2006/relationships">
+  <p:cSld>
+    <p:bg>
+      <p:bgPr>
+        <a:solidFill>
+          <a:srgbClr val="FFFFFF"/>
+        </a:solidFill>
+        <a:effectLst/>
+      </p:bgPr>
+    </p:bg>
+    <p:spTree>
+      <p:nvGrpSpPr>
+        <p:cNvPr id="1" name=""/>
+        <p:cNvGrpSpPr/>
+        <p:nvPr/>
+      </p:nvGrpSpPr>
+      <p:grpSpPr/>
+      <p:sp>
+        <p:nvSpPr>
+          <p:cNvPr id="2" name="TextBox 1"/>
+          <p:cNvSpPr txBox="1"/>
+          <p:nvPr/>
+        </p:nvSpPr>
+        <p:spPr>
+          <a:xfrm>
+            <a:off x="548640" y="274320"/>
+            <a:ext cx="11064240" cy="822960"/>
+          </a:xfrm>
+          <a:prstGeom prst="rect">
+            <a:avLst/>
+          </a:prstGeom>
+          <a:noFill/>
+        </p:spPr>
+        <p:txBody>
+          <a:bodyPr wrap="square">
+            <a:spAutoFit/>
+          </a:bodyPr>
+          <a:lstStyle/>
+          <a:p>
+            <a:r>
+              <a:rPr sz="3000" b="1" i="0">
+                <a:solidFill>
+                  <a:srgbClr val="2B6CB0"/>
+                </a:solidFill>
+                <a:latin typeface="Calibri"/>
+              </a:rPr>
+              <a:t>Activity 2</a:t>
+            </a:r>
+          </a:p>
+        </p:txBody>
+      </p:sp>
+      <p:sp>
+        <p:nvSpPr>
+          <p:cNvPr id="3" name="TextBox 2"/>
+          <p:cNvSpPr txBox="1"/>
+          <p:nvPr/>
+        </p:nvSpPr>
+        <p:spPr>
+          <a:xfrm>
+            <a:off x="640080" y="1280160"/>
+            <a:ext cx="10881360" cy="5120640"/>
+          </a:xfrm>
+          <a:prstGeom prst="rect">
+            <a:avLst/>
+          </a:prstGeom>
+          <a:noFill/>
+        </p:spPr>
+        <p:txBody>
+          <a:bodyPr wrap="square">
+            <a:spAutoFit/>
+          </a:bodyPr>
+          <a:lstStyle/>
+          <a:p>
+            <a:pPr/>
+            <a:r>
+              <a:rPr sz="2200" b="1">
+                <a:solidFill>
+                  <a:srgbClr val="2B6CB0"/>
+                </a:solidFill>
+                <a:latin typeface="Calibri"/>
+              </a:rPr>
+              <a:t>Spot and Fix: The Terrible Memory Essay  (10 min)</a:t>
+            </a:r>
+          </a:p>
+          <a:p>
+            <a:pPr lvl="1"/>
+            <a:r>
+              <a:rPr sz="2000" b="0">
+                <a:solidFill>
+                  <a:srgbClr val="222222"/>
+                </a:solidFill>
+                <a:latin typeface="Calibri"/>
+              </a:rPr>
+              <a:t>Project the planted-error paragraph: RAM is non-volatile main memory that holds running programs. ROM is volatile and stores the user's documents. When RAM is full, virtual memory adds extra RAM chips so more programs can run. Pages are swapped between the hard drive and ROM, and because the disk is faster than RAM this speeds the computer up. If too much swapping occurs the system enjoys disk thrashing, which improves performance. Cache is a section of RAM that is slower than main memory.</a:t>
+            </a:r>
+          </a:p>
+          <a:p>
+            <a:pPr lvl="1"/>
+            <a:r>
+              <a:rPr sz="2000" b="0">
+                <a:solidFill>
+                  <a:srgbClr val="222222"/>
+                </a:solidFill>
+                <a:latin typeface="Calibri"/>
+              </a:rPr>
+              <a:t>Tell pairs there are 8 errors; they find and number every one</a:t>
+            </a:r>
+          </a:p>
+          <a:p>
+            <a:pPr lvl="1"/>
+            <a:r>
+              <a:rPr sz="2000" b="0">
+                <a:solidFill>
+                  <a:srgbClr val="222222"/>
+                </a:solidFill>
+                <a:latin typeface="Calibri"/>
+              </a:rPr>
+              <a:t>Pairs rewrite the worst two sentences correctly on whiteboards</a:t>
+            </a:r>
+          </a:p>
+          <a:p>
+            <a:pPr lvl="1"/>
+            <a:r>
+              <a:rPr sz="2000" b="0">
+                <a:solidFill>
+                  <a:srgbClr val="222222"/>
+                </a:solidFill>
+                <a:latin typeface="Calibri"/>
+              </a:rPr>
+              <a:t>Class check, one point per error found plus one per accurate fix</a:t>
+            </a:r>
+          </a:p>
+          <a:p>
+            <a:pPr lvl="1"/>
+            <a:r>
+              <a:rPr sz="2000" b="0">
+                <a:solidFill>
+                  <a:srgbClr val="222222"/>
+                </a:solidFill>
+                <a:latin typeface="Calibri"/>
+              </a:rPr>
+              <a:t>Answers: RAM is volatile; ROM is non-volatile; ROM holds firmware/bootstrap not documents; virtual memory uses secondary storage, it does not add RAM; pages swap between disk and RAM, not ROM; disk is slower than RAM so it slows things down; thrashing degrades performance; cache is separate fast memory on/near the CPU, faster than RAM</a:t>
+            </a:r>
+          </a:p>
+          <a:p>
+            <a:pPr/>
+            <a:r>
+              <a:rPr sz="1800" b="0">
+                <a:solidFill>
+                  <a:srgbClr val="B76E00"/>
+                </a:solidFill>
+                <a:latin typeface="Calibri"/>
+              </a:rPr>
+              <a:t>Stretch: Pairs write their own 3-error paragraph on input/output devices for another pair to debug.</a:t>
+            </a:r>
+          </a:p>
+        </p:txBody>
+      </p:sp>
+    </p:spTree>
+  </p:cSld>
+  <p:clrMapOvr>
+    <a:masterClrMapping/>
+  </p:clrMapOvr>
+</p:sld>
+</file>
+
+<file path=ppt/slides/slide21.xml><?xml version="1.0" encoding="utf-8"?>
+<p:sld xmlns:a="http://schemas.openxmlformats.org/drawingml/2006/main" xmlns:p="http://schemas.openxmlformats.org/presentationml/2006/main" xmlns:r="http://schemas.openxmlformats.org/officeDocument/2006/relationships">
+  <p:cSld>
+    <p:bg>
+      <p:bgPr>
+        <a:solidFill>
+          <a:srgbClr val="FFFFFF"/>
+        </a:solidFill>
+        <a:effectLst/>
+      </p:bgPr>
+    </p:bg>
+    <p:spTree>
+      <p:nvGrpSpPr>
+        <p:cNvPr id="1" name=""/>
+        <p:cNvGrpSpPr/>
+        <p:nvPr/>
+      </p:nvGrpSpPr>
+      <p:grpSpPr/>
+      <p:sp>
+        <p:nvSpPr>
+          <p:cNvPr id="2" name="TextBox 1"/>
+          <p:cNvSpPr txBox="1"/>
+          <p:nvPr/>
+        </p:nvSpPr>
+        <p:spPr>
+          <a:xfrm>
+            <a:off x="548640" y="274320"/>
+            <a:ext cx="11064240" cy="822960"/>
+          </a:xfrm>
+          <a:prstGeom prst="rect">
+            <a:avLst/>
+          </a:prstGeom>
+          <a:noFill/>
+        </p:spPr>
+        <p:txBody>
+          <a:bodyPr wrap="square">
+            <a:spAutoFit/>
+          </a:bodyPr>
+          <a:lstStyle/>
+          <a:p>
+            <a:r>
+              <a:rPr sz="3000" b="1" i="0">
+                <a:solidFill>
+                  <a:srgbClr val="2B6CB0"/>
+                </a:solidFill>
+                <a:latin typeface="Calibri"/>
+              </a:rPr>
+              <a:t>Activity 3</a:t>
+            </a:r>
+          </a:p>
+        </p:txBody>
+      </p:sp>
+      <p:sp>
+        <p:nvSpPr>
+          <p:cNvPr id="3" name="TextBox 2"/>
+          <p:cNvSpPr txBox="1"/>
+          <p:nvPr/>
+        </p:nvSpPr>
+        <p:spPr>
+          <a:xfrm>
+            <a:off x="640080" y="1280160"/>
+            <a:ext cx="10881360" cy="5120640"/>
+          </a:xfrm>
+          <a:prstGeom prst="rect">
+            <a:avLst/>
+          </a:prstGeom>
+          <a:noFill/>
+        </p:spPr>
+        <p:txBody>
+          <a:bodyPr wrap="square">
+            <a:spAutoFit/>
+          </a:bodyPr>
+          <a:lstStyle/>
+          <a:p>
+            <a:pPr/>
+            <a:r>
+              <a:rPr sz="2200" b="1">
+                <a:solidFill>
+                  <a:srgbClr val="2B6CB0"/>
+                </a:solidFill>
+                <a:latin typeface="Calibri"/>
+              </a:rPr>
+              <a:t>Magnetic / Flash / Optical Human Sort  (10 min)</a:t>
+            </a:r>
+          </a:p>
+          <a:p>
+            <a:pPr lvl="1"/>
+            <a:r>
+              <a:rPr sz="2000" b="0">
+                <a:solidFill>
+                  <a:srgbClr val="222222"/>
+                </a:solidFill>
+                <a:latin typeface="Calibri"/>
+              </a:rPr>
+              <a:t>Label three zones of the room MAGNETIC, FLASH and OPTICAL; give each student or pair one statement card</a:t>
+            </a:r>
+          </a:p>
+          <a:p>
+            <a:pPr lvl="1"/>
+            <a:r>
+              <a:rPr sz="2000" b="0">
+                <a:solidFill>
+                  <a:srgbClr val="222222"/>
+                </a:solidFill>
+                <a:latin typeface="Calibri"/>
+              </a:rPr>
+              <a:t>Cards: stores data as magnetised regions on a platter; laser reads pits and lands; traps electrons in memory cells; no moving parts; wear levelling extends its life; read/write head on an actuator arm; cheapest per disc to post; vulnerable to scratches; finite number of write cycles; high capacity at low cost per GB; serial access when on tape; silent and shock-resistant</a:t>
+            </a:r>
+          </a:p>
+          <a:p>
+            <a:pPr lvl="1"/>
+            <a:r>
+              <a:rPr sz="2000" b="0">
+                <a:solidFill>
+                  <a:srgbClr val="222222"/>
+                </a:solidFill>
+                <a:latin typeface="Calibri"/>
+              </a:rPr>
+              <a:t>Students read their card aloud and walk to a zone; each zone then audits itself and cross-examines doubtful members</a:t>
+            </a:r>
+          </a:p>
+          <a:p>
+            <a:pPr lvl="1"/>
+            <a:r>
+              <a:rPr sz="2000" b="0">
+                <a:solidFill>
+                  <a:srgbClr val="222222"/>
+                </a:solidFill>
+                <a:latin typeface="Calibri"/>
+              </a:rPr>
+              <a:t>Call the two deliberate wobbles: high capacity at low cost per GB (magnetic, but let flash argue) and no moving parts (flash, though optical discs themselves have none — the drive does)</a:t>
+            </a:r>
+          </a:p>
+          <a:p>
+            <a:pPr lvl="1"/>
+            <a:r>
+              <a:rPr sz="2000" b="0">
+                <a:solidFill>
+                  <a:srgbClr val="222222"/>
+                </a:solidFill>
+                <a:latin typeface="Calibri"/>
+              </a:rPr>
+              <a:t>Each zone composes one new true statement that could only belong to them</a:t>
+            </a:r>
+          </a:p>
+          <a:p>
+            <a:pPr/>
+            <a:r>
+              <a:rPr sz="1800" b="0">
+                <a:solidFill>
+                  <a:srgbClr val="B76E00"/>
+                </a:solidFill>
+                <a:latin typeface="Calibri"/>
+              </a:rPr>
+              <a:t>Stretch: Zone representatives explain why their medium is non-volatile using its physical mechanism.</a:t>
+            </a:r>
+          </a:p>
+        </p:txBody>
+      </p:sp>
+    </p:spTree>
+  </p:cSld>
+  <p:clrMapOvr>
+    <a:masterClrMapping/>
+  </p:clrMapOvr>
+</p:sld>
+</file>
+
+<file path=ppt/slides/slide22.xml><?xml version="1.0" encoding="utf-8"?>
+<p:sld xmlns:a="http://schemas.openxmlformats.org/drawingml/2006/main" xmlns:p="http://schemas.openxmlformats.org/presentationml/2006/main" xmlns:r="http://schemas.openxmlformats.org/officeDocument/2006/relationships">
+  <p:cSld>
+    <p:bg>
+      <p:bgPr>
+        <a:solidFill>
+          <a:srgbClr val="FFFFFF"/>
+        </a:solidFill>
+        <a:effectLst/>
+      </p:bgPr>
+    </p:bg>
+    <p:spTree>
+      <p:nvGrpSpPr>
+        <p:cNvPr id="1" name=""/>
+        <p:cNvGrpSpPr/>
+        <p:nvPr/>
+      </p:nvGrpSpPr>
+      <p:grpSpPr/>
+      <p:sp>
+        <p:nvSpPr>
+          <p:cNvPr id="2" name="TextBox 1"/>
+          <p:cNvSpPr txBox="1"/>
+          <p:nvPr/>
+        </p:nvSpPr>
+        <p:spPr>
+          <a:xfrm>
+            <a:off x="548640" y="274320"/>
+            <a:ext cx="11064240" cy="822960"/>
+          </a:xfrm>
+          <a:prstGeom prst="rect">
+            <a:avLst/>
+          </a:prstGeom>
+          <a:noFill/>
+        </p:spPr>
+        <p:txBody>
+          <a:bodyPr wrap="square">
+            <a:spAutoFit/>
+          </a:bodyPr>
+          <a:lstStyle/>
+          <a:p>
+            <a:r>
+              <a:rPr sz="3000" b="1" i="0">
+                <a:solidFill>
+                  <a:srgbClr val="2B6CB0"/>
+                </a:solidFill>
+                <a:latin typeface="Calibri"/>
+              </a:rPr>
+              <a:t>Practice (1-4)</a:t>
+            </a:r>
+          </a:p>
+        </p:txBody>
+      </p:sp>
+      <p:sp>
+        <p:nvSpPr>
+          <p:cNvPr id="3" name="TextBox 2"/>
+          <p:cNvSpPr txBox="1"/>
+          <p:nvPr/>
+        </p:nvSpPr>
+        <p:spPr>
+          <a:xfrm>
+            <a:off x="640080" y="1280160"/>
+            <a:ext cx="10881360" cy="5120640"/>
+          </a:xfrm>
+          <a:prstGeom prst="rect">
+            <a:avLst/>
+          </a:prstGeom>
+          <a:noFill/>
+        </p:spPr>
+        <p:txBody>
+          <a:bodyPr wrap="square">
+            <a:spAutoFit/>
+          </a:bodyPr>
+          <a:lstStyle/>
+          <a:p>
+            <a:r>
+              <a:rPr sz="2000" b="1">
+                <a:solidFill>
+                  <a:srgbClr val="222222"/>
+                </a:solidFill>
+                <a:latin typeface="Calibri"/>
+              </a:rPr>
+              <a:t>1. Describe how data is stored on and read from a hard disk drive. [3]</a:t>
+            </a:r>
+          </a:p>
+          <a:p>
+            <a:r>
+              <a:rPr sz="2000" b="1">
+                <a:solidFill>
+                  <a:srgbClr val="222222"/>
+                </a:solidFill>
+                <a:latin typeface="Calibri"/>
+              </a:rPr>
+              <a:t>2. Describe how an optical disc such as a DVD stores and reads data. [2]</a:t>
+            </a:r>
+          </a:p>
+          <a:p>
+            <a:r>
+              <a:rPr sz="2000" b="1">
+                <a:solidFill>
+                  <a:srgbClr val="222222"/>
+                </a:solidFill>
+                <a:latin typeface="Calibri"/>
+              </a:rPr>
+              <a:t>3. A courier company gives each driver a handheld device used in vans all day. Explain two reasons why flash storage is more suitable than a hard disk for these devices. [4]</a:t>
+            </a:r>
+          </a:p>
+          <a:p>
+            <a:r>
+              <a:rPr sz="2000" b="1">
+                <a:solidFill>
+                  <a:srgbClr val="222222"/>
+                </a:solidFill>
+                <a:latin typeface="Calibri"/>
+              </a:rPr>
+              <a:t>4. State two differences between RAM and ROM. [2]</a:t>
+            </a:r>
+          </a:p>
+        </p:txBody>
+      </p:sp>
+    </p:spTree>
+  </p:cSld>
+  <p:clrMapOvr>
+    <a:masterClrMapping/>
+  </p:clrMapOvr>
+</p:sld>
+</file>
+
+<file path=ppt/slides/slide23.xml><?xml version="1.0" encoding="utf-8"?>
+<p:sld xmlns:a="http://schemas.openxmlformats.org/drawingml/2006/main" xmlns:p="http://schemas.openxmlformats.org/presentationml/2006/main" xmlns:r="http://schemas.openxmlformats.org/officeDocument/2006/relationships">
+  <p:cSld>
+    <p:bg>
+      <p:bgPr>
+        <a:solidFill>
+          <a:srgbClr val="FFFFFF"/>
+        </a:solidFill>
+        <a:effectLst/>
+      </p:bgPr>
+    </p:bg>
+    <p:spTree>
+      <p:nvGrpSpPr>
+        <p:cNvPr id="1" name=""/>
+        <p:cNvGrpSpPr/>
+        <p:nvPr/>
+      </p:nvGrpSpPr>
+      <p:grpSpPr/>
+      <p:sp>
+        <p:nvSpPr>
+          <p:cNvPr id="2" name="TextBox 1"/>
+          <p:cNvSpPr txBox="1"/>
+          <p:nvPr/>
+        </p:nvSpPr>
+        <p:spPr>
+          <a:xfrm>
+            <a:off x="548640" y="274320"/>
+            <a:ext cx="11064240" cy="822960"/>
+          </a:xfrm>
+          <a:prstGeom prst="rect">
+            <a:avLst/>
+          </a:prstGeom>
+          <a:noFill/>
+        </p:spPr>
+        <p:txBody>
+          <a:bodyPr wrap="square">
+            <a:spAutoFit/>
+          </a:bodyPr>
+          <a:lstStyle/>
+          <a:p>
+            <a:r>
+              <a:rPr sz="3000" b="1" i="0">
+                <a:solidFill>
+                  <a:srgbClr val="2B6CB0"/>
+                </a:solidFill>
+                <a:latin typeface="Calibri"/>
+              </a:rPr>
+              <a:t>Practice — answers (1-4)</a:t>
+            </a:r>
+          </a:p>
+        </p:txBody>
+      </p:sp>
+      <p:sp>
+        <p:nvSpPr>
+          <p:cNvPr id="3" name="TextBox 2"/>
+          <p:cNvSpPr txBox="1"/>
+          <p:nvPr/>
+        </p:nvSpPr>
+        <p:spPr>
+          <a:xfrm>
+            <a:off x="640080" y="1280160"/>
+            <a:ext cx="10881360" cy="5120640"/>
+          </a:xfrm>
+          <a:prstGeom prst="rect">
+            <a:avLst/>
+          </a:prstGeom>
+          <a:noFill/>
+        </p:spPr>
+        <p:txBody>
+          <a:bodyPr wrap="square">
+            <a:spAutoFit/>
+          </a:bodyPr>
+          <a:lstStyle/>
+          <a:p>
+            <a:r>
+              <a:rPr sz="2000" b="1">
+                <a:solidFill>
+                  <a:srgbClr val="222222"/>
+                </a:solidFill>
+                <a:latin typeface="Calibri"/>
+              </a:rPr>
+              <a:t>1. Describe how data is stored on and read from a hard disk drive. [3]</a:t>
+            </a:r>
+          </a:p>
+          <a:p>
+            <a:pPr lvl="1"/>
+            <a:r>
+              <a:rPr sz="1800" i="1">
+                <a:solidFill>
+                  <a:srgbClr val="B76E00"/>
+                </a:solidFill>
+                <a:latin typeface="Calibri"/>
+              </a:rPr>
+              <a:t>Answer: Data is stored as magnetised patterns/regions (1) on a spinning platter (1); a read/write head on a moving actuator arm detects or changes the magnetisation to read or write the data (1).</a:t>
+            </a:r>
+          </a:p>
+          <a:p>
+            <a:r>
+              <a:rPr sz="2000" b="1">
+                <a:solidFill>
+                  <a:srgbClr val="222222"/>
+                </a:solidFill>
+                <a:latin typeface="Calibri"/>
+              </a:rPr>
+              <a:t>2. Describe how an optical disc such as a DVD stores and reads data. [2]</a:t>
+            </a:r>
+          </a:p>
+          <a:p>
+            <a:pPr lvl="1"/>
+            <a:r>
+              <a:rPr sz="1800" i="1">
+                <a:solidFill>
+                  <a:srgbClr val="B76E00"/>
+                </a:solidFill>
+                <a:latin typeface="Calibri"/>
+              </a:rPr>
+              <a:t>Answer: Data is stored as pits and lands on the disc surface (1); a laser shines on the surface and the difference in reflected light is read as binary data (1).</a:t>
+            </a:r>
+          </a:p>
+          <a:p>
+            <a:r>
+              <a:rPr sz="2000" b="1">
+                <a:solidFill>
+                  <a:srgbClr val="222222"/>
+                </a:solidFill>
+                <a:latin typeface="Calibri"/>
+              </a:rPr>
+              <a:t>3. A courier company gives each driver a handheld device used in vans all day. Explain two reasons why flash storage is more suitable than a hard disk for these devices. [4]</a:t>
+            </a:r>
+          </a:p>
+          <a:p>
+            <a:pPr lvl="1"/>
+            <a:r>
+              <a:rPr sz="1800" i="1">
+                <a:solidFill>
+                  <a:srgbClr val="B76E00"/>
+                </a:solidFill>
+                <a:latin typeface="Calibri"/>
+              </a:rPr>
+              <a:t>Answer: Flash has no moving parts (1) so it withstands the constant vibration and knocks of van use, where an HDD's head and platter could be damaged (1); flash also has low power consumption (1), extending the battery life of a handheld device used all day (1). (Also credit: faster access, smaller and lighter.)</a:t>
+            </a:r>
+          </a:p>
+          <a:p>
+            <a:r>
+              <a:rPr sz="2000" b="1">
+                <a:solidFill>
+                  <a:srgbClr val="222222"/>
+                </a:solidFill>
+                <a:latin typeface="Calibri"/>
+              </a:rPr>
+              <a:t>4. State two differences between RAM and ROM. [2]</a:t>
+            </a:r>
+          </a:p>
+          <a:p>
+            <a:pPr lvl="1"/>
+            <a:r>
+              <a:rPr sz="1800" i="1">
+                <a:solidFill>
+                  <a:srgbClr val="B76E00"/>
+                </a:solidFill>
+                <a:latin typeface="Calibri"/>
+              </a:rPr>
+              <a:t>Answer: RAM is volatile whereas ROM is non-volatile (1); RAM is read/write and holds running programs and data, whereas ROM is normally read-only and holds the bootstrap/BIOS firmware (1).</a:t>
+            </a:r>
+          </a:p>
+        </p:txBody>
+      </p:sp>
+    </p:spTree>
+  </p:cSld>
+  <p:clrMapOvr>
+    <a:masterClrMapping/>
+  </p:clrMapOvr>
+</p:sld>
+</file>
+
+<file path=ppt/slides/slide24.xml><?xml version="1.0" encoding="utf-8"?>
+<p:sld xmlns:a="http://schemas.openxmlformats.org/drawingml/2006/main" xmlns:p="http://schemas.openxmlformats.org/presentationml/2006/main" xmlns:r="http://schemas.openxmlformats.org/officeDocument/2006/relationships">
+  <p:cSld>
+    <p:bg>
+      <p:bgPr>
+        <a:solidFill>
+          <a:srgbClr val="FFFFFF"/>
+        </a:solidFill>
+        <a:effectLst/>
+      </p:bgPr>
+    </p:bg>
+    <p:spTree>
+      <p:nvGrpSpPr>
+        <p:cNvPr id="1" name=""/>
+        <p:cNvGrpSpPr/>
+        <p:nvPr/>
+      </p:nvGrpSpPr>
+      <p:grpSpPr/>
+      <p:sp>
+        <p:nvSpPr>
+          <p:cNvPr id="2" name="TextBox 1"/>
+          <p:cNvSpPr txBox="1"/>
+          <p:nvPr/>
+        </p:nvSpPr>
+        <p:spPr>
+          <a:xfrm>
+            <a:off x="548640" y="274320"/>
+            <a:ext cx="11064240" cy="822960"/>
+          </a:xfrm>
+          <a:prstGeom prst="rect">
+            <a:avLst/>
+          </a:prstGeom>
+          <a:noFill/>
+        </p:spPr>
+        <p:txBody>
+          <a:bodyPr wrap="square">
+            <a:spAutoFit/>
+          </a:bodyPr>
+          <a:lstStyle/>
+          <a:p>
+            <a:r>
+              <a:rPr sz="3000" b="1" i="0">
+                <a:solidFill>
+                  <a:srgbClr val="2B6CB0"/>
+                </a:solidFill>
+                <a:latin typeface="Calibri"/>
+              </a:rPr>
+              <a:t>Practice (5-8)</a:t>
+            </a:r>
+          </a:p>
+        </p:txBody>
+      </p:sp>
+      <p:sp>
+        <p:nvSpPr>
+          <p:cNvPr id="3" name="TextBox 2"/>
+          <p:cNvSpPr txBox="1"/>
+          <p:nvPr/>
+        </p:nvSpPr>
+        <p:spPr>
+          <a:xfrm>
+            <a:off x="640080" y="1280160"/>
+            <a:ext cx="10881360" cy="5120640"/>
+          </a:xfrm>
+          <a:prstGeom prst="rect">
+            <a:avLst/>
+          </a:prstGeom>
+          <a:noFill/>
+        </p:spPr>
+        <p:txBody>
+          <a:bodyPr wrap="square">
+            <a:spAutoFit/>
+          </a:bodyPr>
+          <a:lstStyle/>
+          <a:p>
+            <a:r>
+              <a:rPr sz="2000" b="1">
+                <a:solidFill>
+                  <a:srgbClr val="222222"/>
+                </a:solidFill>
+                <a:latin typeface="Calibri"/>
+              </a:rPr>
+              <a:t>1. Explain how virtual memory allows a computer with 4 GB of RAM to run programs needing more than 4 GB. [4]</a:t>
+            </a:r>
+          </a:p>
+          <a:p>
+            <a:r>
+              <a:rPr sz="2000" b="1">
+                <a:solidFill>
+                  <a:srgbClr val="222222"/>
+                </a:solidFill>
+                <a:latin typeface="Calibri"/>
+              </a:rPr>
+              <a:t>2. State what is meant by disk thrashing. [2]</a:t>
+            </a:r>
+          </a:p>
+          <a:p>
+            <a:r>
+              <a:rPr sz="2000" b="1">
+                <a:solidFill>
+                  <a:srgbClr val="222222"/>
+                </a:solidFill>
+                <a:latin typeface="Calibri"/>
+              </a:rPr>
+              <a:t>3. A photography business is deciding between cloud storage and an external hard drive for backing up images. Discuss the advantages and disadvantages of the cloud option. [6]</a:t>
+            </a:r>
+          </a:p>
+          <a:p>
+            <a:r>
+              <a:rPr sz="2000" b="1">
+                <a:solidFill>
+                  <a:srgbClr val="222222"/>
+                </a:solidFill>
+                <a:latin typeface="Calibri"/>
+              </a:rPr>
+              <a:t>4. A supermarket self-checkout needs one input and one output device besides the touchscreen. State a suitable device of each type and justify each choice. [4]</a:t>
+            </a:r>
+          </a:p>
+        </p:txBody>
+      </p:sp>
+    </p:spTree>
+  </p:cSld>
+  <p:clrMapOvr>
+    <a:masterClrMapping/>
+  </p:clrMapOvr>
+</p:sld>
+</file>
+
+<file path=ppt/slides/slide25.xml><?xml version="1.0" encoding="utf-8"?>
+<p:sld xmlns:a="http://schemas.openxmlformats.org/drawingml/2006/main" xmlns:p="http://schemas.openxmlformats.org/presentationml/2006/main" xmlns:r="http://schemas.openxmlformats.org/officeDocument/2006/relationships">
+  <p:cSld>
+    <p:bg>
+      <p:bgPr>
+        <a:solidFill>
+          <a:srgbClr val="FFFFFF"/>
+        </a:solidFill>
+        <a:effectLst/>
+      </p:bgPr>
+    </p:bg>
+    <p:spTree>
+      <p:nvGrpSpPr>
+        <p:cNvPr id="1" name=""/>
+        <p:cNvGrpSpPr/>
+        <p:nvPr/>
+      </p:nvGrpSpPr>
+      <p:grpSpPr/>
+      <p:sp>
+        <p:nvSpPr>
+          <p:cNvPr id="2" name="TextBox 1"/>
+          <p:cNvSpPr txBox="1"/>
+          <p:nvPr/>
+        </p:nvSpPr>
+        <p:spPr>
+          <a:xfrm>
+            <a:off x="548640" y="274320"/>
+            <a:ext cx="11064240" cy="822960"/>
+          </a:xfrm>
+          <a:prstGeom prst="rect">
+            <a:avLst/>
+          </a:prstGeom>
+          <a:noFill/>
+        </p:spPr>
+        <p:txBody>
+          <a:bodyPr wrap="square">
+            <a:spAutoFit/>
+          </a:bodyPr>
+          <a:lstStyle/>
+          <a:p>
+            <a:r>
+              <a:rPr sz="3000" b="1" i="0">
+                <a:solidFill>
+                  <a:srgbClr val="2B6CB0"/>
+                </a:solidFill>
+                <a:latin typeface="Calibri"/>
+              </a:rPr>
+              <a:t>Practice — answers (5-8)</a:t>
+            </a:r>
+          </a:p>
+        </p:txBody>
+      </p:sp>
+      <p:sp>
+        <p:nvSpPr>
+          <p:cNvPr id="3" name="TextBox 2"/>
+          <p:cNvSpPr txBox="1"/>
+          <p:nvPr/>
+        </p:nvSpPr>
+        <p:spPr>
+          <a:xfrm>
+            <a:off x="640080" y="1280160"/>
+            <a:ext cx="10881360" cy="5120640"/>
+          </a:xfrm>
+          <a:prstGeom prst="rect">
+            <a:avLst/>
+          </a:prstGeom>
+          <a:noFill/>
+        </p:spPr>
+        <p:txBody>
+          <a:bodyPr wrap="square">
+            <a:spAutoFit/>
+          </a:bodyPr>
+          <a:lstStyle/>
+          <a:p>
+            <a:r>
+              <a:rPr sz="2000" b="1">
+                <a:solidFill>
+                  <a:srgbClr val="222222"/>
+                </a:solidFill>
+                <a:latin typeface="Calibri"/>
+              </a:rPr>
+              <a:t>1. Explain how virtual memory allows a computer with 4 GB of RAM to run programs needing more than 4 GB. [4]</a:t>
+            </a:r>
+          </a:p>
+          <a:p>
+            <a:pPr lvl="1"/>
+            <a:r>
+              <a:rPr sz="1800" i="1">
+                <a:solidFill>
+                  <a:srgbClr val="B76E00"/>
+                </a:solidFill>
+                <a:latin typeface="Calibri"/>
+              </a:rPr>
+              <a:t>Answer: The OS uses part of secondary storage as a paging/swap file (1); less-recently-used pages are moved out of RAM to this file, freeing physical RAM (1); when a swapped-out page is needed it is loaded back into RAM, possibly evicting another (1); this lets total program memory exceed physical RAM, though disk is much slower so heavy paging reduces performance (1).</a:t>
+            </a:r>
+          </a:p>
+          <a:p>
+            <a:r>
+              <a:rPr sz="2000" b="1">
+                <a:solidFill>
+                  <a:srgbClr val="222222"/>
+                </a:solidFill>
+                <a:latin typeface="Calibri"/>
+              </a:rPr>
+              <a:t>2. State what is meant by disk thrashing. [2]</a:t>
+            </a:r>
+          </a:p>
+          <a:p>
+            <a:pPr lvl="1"/>
+            <a:r>
+              <a:rPr sz="1800" i="1">
+                <a:solidFill>
+                  <a:srgbClr val="B76E00"/>
+                </a:solidFill>
+                <a:latin typeface="Calibri"/>
+              </a:rPr>
+              <a:t>Answer: Excessive paging when RAM is far too full (1), so the system spends most of its time swapping pages between disk and RAM instead of doing useful work, and performance collapses (1).</a:t>
+            </a:r>
+          </a:p>
+          <a:p>
+            <a:r>
+              <a:rPr sz="2000" b="1">
+                <a:solidFill>
+                  <a:srgbClr val="222222"/>
+                </a:solidFill>
+                <a:latin typeface="Calibri"/>
+              </a:rPr>
+              <a:t>3. A photography business is deciding between cloud storage and an external hard drive for backing up images. Discuss the advantages and disadvantages of the cloud option. [6]</a:t>
+            </a:r>
+          </a:p>
+          <a:p>
+            <a:pPr lvl="1"/>
+            <a:r>
+              <a:rPr sz="1800" i="1">
+                <a:solidFill>
+                  <a:srgbClr val="B76E00"/>
+                </a:solidFill>
+                <a:latin typeface="Calibri"/>
+              </a:rPr>
+              <a:t>Answer: Advantages: files are stored off-site, so they survive local theft, fire or hardware failure (1); accessible from anywhere with internet, aiding work on location (1); capacity scales without buying hardware (1). Disadvantages: an internet connection is required, and uploads of large image files may be slow (1); ongoing subscription costs can exceed the one-off cost of a drive over time (1); data is held by a third party, raising security/privacy concerns (1).</a:t>
+            </a:r>
+          </a:p>
+          <a:p>
+            <a:r>
+              <a:rPr sz="2000" b="1">
+                <a:solidFill>
+                  <a:srgbClr val="222222"/>
+                </a:solidFill>
+                <a:latin typeface="Calibri"/>
+              </a:rPr>
+              <a:t>4. A supermarket self-checkout needs one input and one output device besides the touchscreen. State a suitable device of each type and justify each choice. [4]</a:t>
+            </a:r>
+          </a:p>
+          <a:p>
+            <a:pPr lvl="1"/>
+            <a:r>
+              <a:rPr sz="1800" i="1">
+                <a:solidFill>
+                  <a:srgbClr val="B76E00"/>
+                </a:solidFill>
+                <a:latin typeface="Calibri"/>
+              </a:rPr>
+              <a:t>Answer: Input: a barcode scanner (1) because it identifies products quickly and accurately with no typing by the customer (1). Output: a receipt printer (1) because customers need a physical proof of purchase to take away (1). (Credit other sensible pairs, e.g. scales as input, speaker for prompts as output, with matching justification.)</a:t>
+            </a:r>
+          </a:p>
+        </p:txBody>
+      </p:sp>
+    </p:spTree>
+  </p:cSld>
+  <p:clrMapOvr>
+    <a:masterClrMapping/>
+  </p:clrMapOvr>
+</p:sld>
+</file>
+
+<file path=ppt/slides/slide26.xml><?xml version="1.0" encoding="utf-8"?>
+<p:sld xmlns:a="http://schemas.openxmlformats.org/drawingml/2006/main" xmlns:p="http://schemas.openxmlformats.org/presentationml/2006/main" xmlns:r="http://schemas.openxmlformats.org/officeDocument/2006/relationships">
+  <p:cSld>
+    <p:bg>
+      <p:bgPr>
+        <a:solidFill>
+          <a:srgbClr val="FFFFFF"/>
+        </a:solidFill>
+        <a:effectLst/>
+      </p:bgPr>
+    </p:bg>
+    <p:spTree>
+      <p:nvGrpSpPr>
+        <p:cNvPr id="1" name=""/>
+        <p:cNvGrpSpPr/>
+        <p:nvPr/>
+      </p:nvGrpSpPr>
+      <p:grpSpPr/>
+      <p:sp>
+        <p:nvSpPr>
+          <p:cNvPr id="2" name="TextBox 1"/>
+          <p:cNvSpPr txBox="1"/>
+          <p:nvPr/>
+        </p:nvSpPr>
+        <p:spPr>
+          <a:xfrm>
+            <a:off x="548640" y="274320"/>
+            <a:ext cx="11064240" cy="822960"/>
+          </a:xfrm>
+          <a:prstGeom prst="rect">
+            <a:avLst/>
+          </a:prstGeom>
+          <a:noFill/>
+        </p:spPr>
+        <p:txBody>
+          <a:bodyPr wrap="square">
+            <a:spAutoFit/>
+          </a:bodyPr>
+          <a:lstStyle/>
+          <a:p>
+            <a:r>
+              <a:rPr sz="3000" b="1" i="0">
+                <a:solidFill>
+                  <a:srgbClr val="2B6CB0"/>
+                </a:solidFill>
+                <a:latin typeface="Calibri"/>
+              </a:rPr>
+              <a:t>Common misconceptions</a:t>
+            </a:r>
+          </a:p>
+        </p:txBody>
+      </p:sp>
+      <p:sp>
+        <p:nvSpPr>
+          <p:cNvPr id="3" name="TextBox 2"/>
+          <p:cNvSpPr txBox="1"/>
+          <p:nvPr/>
+        </p:nvSpPr>
+        <p:spPr>
+          <a:xfrm>
+            <a:off x="640080" y="1280160"/>
+            <a:ext cx="10881360" cy="5120640"/>
+          </a:xfrm>
+          <a:prstGeom prst="rect">
+            <a:avLst/>
+          </a:prstGeom>
+          <a:noFill/>
+        </p:spPr>
+        <p:txBody>
+          <a:bodyPr wrap="square">
+            <a:spAutoFit/>
+          </a:bodyPr>
+          <a:lstStyle/>
+          <a:p>
+            <a:pPr/>
+            <a:r>
+              <a:rPr sz="2000" b="0">
+                <a:solidFill>
+                  <a:srgbClr val="222222"/>
+                </a:solidFill>
+                <a:latin typeface="Calibri"/>
+              </a:rPr>
+              <a:t>✗ Students often think virtual memory adds extra RAM, but it uses secondary storage to stand in for RAM, and it is far slower.</a:t>
+            </a:r>
+          </a:p>
+          <a:p>
+            <a:pPr/>
+            <a:r>
+              <a:rPr sz="2000" b="0">
+                <a:solidFill>
+                  <a:srgbClr val="222222"/>
+                </a:solidFill>
+                <a:latin typeface="Calibri"/>
+              </a:rPr>
+              <a:t>✗ Students often confuse virtual memory with virtual (cloud) storage; one extends RAM using a paging file, the other stores files on remote servers.</a:t>
+            </a:r>
+          </a:p>
+          <a:p>
+            <a:pPr/>
+            <a:r>
+              <a:rPr sz="2000" b="0">
+                <a:solidFill>
+                  <a:srgbClr val="222222"/>
+                </a:solidFill>
+                <a:latin typeface="Calibri"/>
+              </a:rPr>
+              <a:t>✗ Students often think an actuator is an input device, but it is an output: it acts on the world, while sensors provide the input.</a:t>
+            </a:r>
+          </a:p>
+          <a:p>
+            <a:pPr/>
+            <a:r>
+              <a:rPr sz="2000" b="0">
+                <a:solidFill>
+                  <a:srgbClr val="222222"/>
+                </a:solidFill>
+                <a:latin typeface="Calibri"/>
+              </a:rPr>
+              <a:t>✗ Students often say SSDs are always better, but HDDs still win on cost per gigabyte and tape wins for large archives.</a:t>
+            </a:r>
+          </a:p>
+          <a:p>
+            <a:pPr/>
+            <a:r>
+              <a:rPr sz="2000" b="0">
+                <a:solidFill>
+                  <a:srgbClr val="222222"/>
+                </a:solidFill>
+                <a:latin typeface="Calibri"/>
+              </a:rPr>
+              <a:t>✗ Students often write generic device pros and cons; marks come from linking each characteristic to the scenario's stated requirement.</a:t>
+            </a:r>
+          </a:p>
+        </p:txBody>
+      </p:sp>
+    </p:spTree>
+  </p:cSld>
+  <p:clrMapOvr>
+    <a:masterClrMapping/>
+  </p:clrMapOvr>
+</p:sld>
+</file>
+
+<file path=ppt/slides/slide27.xml><?xml version="1.0" encoding="utf-8"?>
+<p:sld xmlns:a="http://schemas.openxmlformats.org/drawingml/2006/main" xmlns:p="http://schemas.openxmlformats.org/presentationml/2006/main" xmlns:r="http://schemas.openxmlformats.org/officeDocument/2006/relationships">
+  <p:cSld>
+    <p:bg>
+      <p:bgPr>
+        <a:solidFill>
+          <a:srgbClr val="FFFFFF"/>
+        </a:solidFill>
+        <a:effectLst/>
+      </p:bgPr>
+    </p:bg>
+    <p:spTree>
+      <p:nvGrpSpPr>
+        <p:cNvPr id="1" name=""/>
+        <p:cNvGrpSpPr/>
+        <p:nvPr/>
+      </p:nvGrpSpPr>
+      <p:grpSpPr/>
+      <p:sp>
+        <p:nvSpPr>
+          <p:cNvPr id="2" name="TextBox 1"/>
+          <p:cNvSpPr txBox="1"/>
+          <p:nvPr/>
+        </p:nvSpPr>
+        <p:spPr>
+          <a:xfrm>
+            <a:off x="548640" y="274320"/>
+            <a:ext cx="11064240" cy="822960"/>
+          </a:xfrm>
+          <a:prstGeom prst="rect">
+            <a:avLst/>
+          </a:prstGeom>
+          <a:noFill/>
+        </p:spPr>
+        <p:txBody>
+          <a:bodyPr wrap="square">
+            <a:spAutoFit/>
+          </a:bodyPr>
+          <a:lstStyle/>
+          <a:p>
+            <a:r>
+              <a:rPr sz="3000" b="1" i="0">
+                <a:solidFill>
+                  <a:srgbClr val="2B6CB0"/>
+                </a:solidFill>
+                <a:latin typeface="Calibri"/>
+              </a:rPr>
+              <a:t>How the exam asks this</a:t>
+            </a:r>
+          </a:p>
+        </p:txBody>
+      </p:sp>
+      <p:sp>
+        <p:nvSpPr>
+          <p:cNvPr id="3" name="TextBox 2"/>
+          <p:cNvSpPr txBox="1"/>
+          <p:nvPr/>
+        </p:nvSpPr>
+        <p:spPr>
+          <a:xfrm>
+            <a:off x="640080" y="1280160"/>
+            <a:ext cx="10881360" cy="5120640"/>
+          </a:xfrm>
+          <a:prstGeom prst="rect">
+            <a:avLst/>
+          </a:prstGeom>
+          <a:noFill/>
+        </p:spPr>
+        <p:txBody>
+          <a:bodyPr wrap="square">
+            <a:spAutoFit/>
+          </a:bodyPr>
+          <a:lstStyle/>
+          <a:p>
+            <a:pPr/>
+            <a:r>
+              <a:rPr sz="2000" b="0">
+                <a:solidFill>
+                  <a:srgbClr val="222222"/>
+                </a:solidFill>
+                <a:latin typeface="Calibri"/>
+              </a:rPr>
+              <a:t>Command words: State (name a device, 1 mark), Describe (how a medium stores data, 2-3 marks), Explain (why a device suits a scenario, 3-4 marks), Discuss (storage choice for a business, 6-9 mark levels of response).</a:t>
+            </a:r>
+          </a:p>
+          <a:p>
+            <a:pPr/>
+            <a:r>
+              <a:rPr sz="2000" b="0">
+                <a:solidFill>
+                  <a:srgbClr val="222222"/>
+                </a:solidFill>
+                <a:latin typeface="Calibri"/>
+              </a:rPr>
+              <a:t>Scenario questions cap at AO1 unless every characteristic is applied to a stated requirement — use whereas-style comparisons with a rejected alternative.</a:t>
+            </a:r>
+          </a:p>
+          <a:p>
+            <a:pPr/>
+            <a:r>
+              <a:rPr sz="2000" b="0">
+                <a:solidFill>
+                  <a:srgbClr val="222222"/>
+                </a:solidFill>
+                <a:latin typeface="Calibri"/>
+              </a:rPr>
+              <a:t>Example stem: 'A wildlife charity records video in a remote hide. Discuss the suitability of magnetic, optical and flash storage for this use.'</a:t>
+            </a:r>
+          </a:p>
+          <a:p>
+            <a:pPr/>
+            <a:r>
+              <a:rPr sz="2000" b="0">
+                <a:solidFill>
+                  <a:srgbClr val="222222"/>
+                </a:solidFill>
+                <a:latin typeface="Calibri"/>
+              </a:rPr>
+              <a:t>Be precise on mechanisms: magnetised patterns; pits and lands read by laser; electrons trapped in cells with no moving parts.</a:t>
+            </a:r>
+          </a:p>
+        </p:txBody>
+      </p:sp>
+    </p:spTree>
+  </p:cSld>
+  <p:clrMapOvr>
+    <a:masterClrMapping/>
+  </p:clrMapOvr>
+</p:sld>
+</file>
+
+<file path=ppt/slides/slide28.xml><?xml version="1.0" encoding="utf-8"?>
+<p:sld xmlns:a="http://schemas.openxmlformats.org/drawingml/2006/main" xmlns:p="http://schemas.openxmlformats.org/presentationml/2006/main" xmlns:r="http://schemas.openxmlformats.org/officeDocument/2006/relationships">
+  <p:cSld>
+    <p:bg>
+      <p:bgPr>
+        <a:solidFill>
+          <a:srgbClr val="FFFFFF"/>
+        </a:solidFill>
+        <a:effectLst/>
+      </p:bgPr>
+    </p:bg>
+    <p:spTree>
+      <p:nvGrpSpPr>
+        <p:cNvPr id="1" name=""/>
+        <p:cNvGrpSpPr/>
+        <p:nvPr/>
+      </p:nvGrpSpPr>
+      <p:grpSpPr/>
+      <p:sp>
+        <p:nvSpPr>
+          <p:cNvPr id="2" name="TextBox 1"/>
+          <p:cNvSpPr txBox="1"/>
+          <p:nvPr/>
+        </p:nvSpPr>
+        <p:spPr>
+          <a:xfrm>
+            <a:off x="548640" y="274320"/>
+            <a:ext cx="11064240" cy="822960"/>
+          </a:xfrm>
+          <a:prstGeom prst="rect">
+            <a:avLst/>
+          </a:prstGeom>
+          <a:noFill/>
+        </p:spPr>
+        <p:txBody>
+          <a:bodyPr wrap="square">
+            <a:spAutoFit/>
+          </a:bodyPr>
+          <a:lstStyle/>
+          <a:p>
+            <a:r>
+              <a:rPr sz="3000" b="1" i="0">
+                <a:solidFill>
+                  <a:srgbClr val="2B6CB0"/>
+                </a:solidFill>
+                <a:latin typeface="Calibri"/>
+              </a:rPr>
+              <a:t>Your turn</a:t>
+            </a:r>
+          </a:p>
+        </p:txBody>
+      </p:sp>
+      <p:sp>
+        <p:nvSpPr>
+          <p:cNvPr id="3" name="TextBox 2"/>
+          <p:cNvSpPr txBox="1"/>
+          <p:nvPr/>
+        </p:nvSpPr>
+        <p:spPr>
+          <a:xfrm>
+            <a:off x="640080" y="1280160"/>
+            <a:ext cx="10881360" cy="5120640"/>
+          </a:xfrm>
+          <a:prstGeom prst="rect">
+            <a:avLst/>
+          </a:prstGeom>
+          <a:noFill/>
+        </p:spPr>
+        <p:txBody>
+          <a:bodyPr wrap="square">
+            <a:spAutoFit/>
+          </a:bodyPr>
+          <a:lstStyle/>
+          <a:p>
+            <a:pPr/>
+            <a:r>
+              <a:rPr sz="2400" b="1">
+                <a:solidFill>
+                  <a:srgbClr val="2B6CB0"/>
+                </a:solidFill>
+                <a:latin typeface="Calibri"/>
+              </a:rPr>
+              <a:t>Task</a:t>
+            </a:r>
+          </a:p>
+          <a:p>
+            <a:pPr lvl="1"/>
+            <a:r>
+              <a:rPr sz="2200" b="0">
+                <a:solidFill>
+                  <a:srgbClr val="222222"/>
+                </a:solidFill>
+                <a:latin typeface="Calibri"/>
+              </a:rPr>
+              <a:t>An architecture firm needs: fast working storage for huge CAD files, a way to send finished plans to clients without reliable internet, and a 10-year archive of every project. Recommend a storage technology for each need and justify each choice by linking two characteristics to the requirement and rejecting one named alternative.</a:t>
+            </a:r>
+          </a:p>
+          <a:p>
+            <a:r>
+              <a:rPr sz="2400" b="1">
+                <a:solidFill>
+                  <a:srgbClr val="B76E00"/>
+                </a:solidFill>
+                <a:latin typeface="Calibri"/>
+              </a:rPr>
+              <a:t>Challenge / stretch</a:t>
+            </a:r>
+          </a:p>
+          <a:p>
+            <a:pPr lvl="1"/>
+            <a:r>
+              <a:rPr sz="2200" b="0">
+                <a:solidFill>
+                  <a:srgbClr val="222222"/>
+                </a:solidFill>
+                <a:latin typeface="Calibri"/>
+              </a:rPr>
+              <a:t>Using the lesson catalogue prices, cost a 10-year archive of 24 TB three ways: tape (2 cartridges 80 pounds + 1,500 pound drive = 1,580 pounds), HDDs (6 x 4 TB = 420 pounds, but plan replacement at year 5, total 840 pounds), and cloud (24 x 8 x 12 x 10 = 23,040 pounds). Then argue which wins if the requirement changes to instant retrieval from any office.</a:t>
+            </a:r>
+          </a:p>
+        </p:txBody>
+      </p:sp>
+    </p:spTree>
+  </p:cSld>
+  <p:clrMapOvr>
+    <a:masterClrMapping/>
+  </p:clrMapOvr>
+</p:sld>
+</file>
+
+<file path=ppt/slides/slide29.xml><?xml version="1.0" encoding="utf-8"?>
+<p:sld xmlns:a="http://schemas.openxmlformats.org/drawingml/2006/main" xmlns:p="http://schemas.openxmlformats.org/presentationml/2006/main" xmlns:r="http://schemas.openxmlformats.org/officeDocument/2006/relationships">
+  <p:cSld>
+    <p:bg>
+      <p:bgPr>
+        <a:solidFill>
+          <a:srgbClr val="FFFFFF"/>
+        </a:solidFill>
+        <a:effectLst/>
+      </p:bgPr>
+    </p:bg>
+    <p:spTree>
+      <p:nvGrpSpPr>
+        <p:cNvPr id="1" name=""/>
+        <p:cNvGrpSpPr/>
+        <p:nvPr/>
+      </p:nvGrpSpPr>
+      <p:grpSpPr/>
+      <p:sp>
+        <p:nvSpPr>
+          <p:cNvPr id="2" name="TextBox 1"/>
+          <p:cNvSpPr txBox="1"/>
+          <p:nvPr/>
+        </p:nvSpPr>
+        <p:spPr>
+          <a:xfrm>
+            <a:off x="548640" y="274320"/>
+            <a:ext cx="11064240" cy="822960"/>
+          </a:xfrm>
+          <a:prstGeom prst="rect">
+            <a:avLst/>
+          </a:prstGeom>
+          <a:noFill/>
+        </p:spPr>
+        <p:txBody>
+          <a:bodyPr wrap="square">
+            <a:spAutoFit/>
+          </a:bodyPr>
+          <a:lstStyle/>
+          <a:p>
+            <a:r>
+              <a:rPr sz="3000" b="1" i="0">
+                <a:solidFill>
+                  <a:srgbClr val="2B6CB0"/>
+                </a:solidFill>
+                <a:latin typeface="Calibri"/>
+              </a:rPr>
+              <a:t>Exit ticket</a:t>
+            </a:r>
+          </a:p>
+        </p:txBody>
+      </p:sp>
+      <p:sp>
+        <p:nvSpPr>
+          <p:cNvPr id="3" name="TextBox 2"/>
+          <p:cNvSpPr txBox="1"/>
+          <p:nvPr/>
+        </p:nvSpPr>
+        <p:spPr>
+          <a:xfrm>
+            <a:off x="640080" y="1280160"/>
+            <a:ext cx="10881360" cy="5120640"/>
+          </a:xfrm>
+          <a:prstGeom prst="rect">
+            <a:avLst/>
+          </a:prstGeom>
+          <a:noFill/>
+        </p:spPr>
+        <p:txBody>
+          <a:bodyPr wrap="square">
+            <a:spAutoFit/>
+          </a:bodyPr>
+          <a:lstStyle/>
+          <a:p>
+            <a:r>
+              <a:rPr sz="2200" b="1">
+                <a:solidFill>
+                  <a:srgbClr val="222222"/>
+                </a:solidFill>
+                <a:latin typeface="Calibri"/>
+              </a:rPr>
+              <a:t>1. Give the physical mechanism for each: magnetic, optical, flash.</a:t>
+            </a:r>
+          </a:p>
+          <a:p>
+            <a:r>
+              <a:rPr sz="2200" b="1">
+                <a:solidFill>
+                  <a:srgbClr val="222222"/>
+                </a:solidFill>
+                <a:latin typeface="Calibri"/>
+              </a:rPr>
+              <a:t>2. What is the difference between virtual memory and virtual storage?</a:t>
+            </a:r>
+          </a:p>
+          <a:p>
+            <a:r>
+              <a:rPr sz="2200" b="1">
+                <a:solidFill>
+                  <a:srgbClr val="222222"/>
+                </a:solidFill>
+                <a:latin typeface="Calibri"/>
+              </a:rPr>
+              <a:t>3. Why is RAM described as volatile and ROM as non-volatile?</a:t>
             </a:r>
           </a:p>
         </p:txBody>
@@ -3960,7 +6348,7 @@
                 </a:solidFill>
                 <a:latin typeface="Calibri"/>
               </a:rPr>
-              <a:t>1. How does a magnetic hard disk drive (HDD) store data?</a:t>
+              <a:t>1. From 1.1.2: state two differences between RISC and CISC processors.</a:t>
             </a:r>
           </a:p>
           <a:p>
@@ -3971,7 +6359,7 @@
                 </a:solidFill>
                 <a:latin typeface="Calibri"/>
               </a:rPr>
-              <a:t>2. Which storage type uses a laser to detect pits and lands?</a:t>
+              <a:t>2. From 1.1.2: why does a GPU outperform a CPU when applying one filter to every pixel of a photo?</a:t>
             </a:r>
           </a:p>
           <a:p>
@@ -3982,7 +6370,7 @@
                 </a:solidFill>
                 <a:latin typeface="Calibri"/>
               </a:rPr>
-              <a:t>3. State two differences between RAM and ROM.</a:t>
+              <a:t>3. From 1.1.2: what limits the speed-up gained by adding more cores?</a:t>
             </a:r>
           </a:p>
           <a:p>
@@ -3993,7 +6381,7 @@
                 </a:solidFill>
                 <a:latin typeface="Calibri"/>
               </a:rPr>
-              <a:t>4. From 1.1.1, what is cache memory and how does it differ from RAM?</a:t>
+              <a:t>4. From 1.1.1: state the roles of the MAR and the MDR during a fetch.</a:t>
             </a:r>
           </a:p>
           <a:p>
@@ -4004,7 +6392,159 @@
                 </a:solidFill>
                 <a:latin typeface="Calibri"/>
               </a:rPr>
-              <a:t>5. From 1.1.2, name one GPGPU use of a GPU.</a:t>
+              <a:t>5. From 1.1.1: what is cache and why does it improve performance?</a:t>
+            </a:r>
+          </a:p>
+        </p:txBody>
+      </p:sp>
+    </p:spTree>
+  </p:cSld>
+  <p:clrMapOvr>
+    <a:masterClrMapping/>
+  </p:clrMapOvr>
+</p:sld>
+</file>
+
+<file path=ppt/slides/slide30.xml><?xml version="1.0" encoding="utf-8"?>
+<p:sld xmlns:a="http://schemas.openxmlformats.org/drawingml/2006/main" xmlns:p="http://schemas.openxmlformats.org/presentationml/2006/main" xmlns:r="http://schemas.openxmlformats.org/officeDocument/2006/relationships">
+  <p:cSld>
+    <p:bg>
+      <p:bgPr>
+        <a:solidFill>
+          <a:srgbClr val="FFFFFF"/>
+        </a:solidFill>
+        <a:effectLst/>
+      </p:bgPr>
+    </p:bg>
+    <p:spTree>
+      <p:nvGrpSpPr>
+        <p:cNvPr id="1" name=""/>
+        <p:cNvGrpSpPr/>
+        <p:nvPr/>
+      </p:nvGrpSpPr>
+      <p:grpSpPr/>
+      <p:sp>
+        <p:nvSpPr>
+          <p:cNvPr id="2" name="TextBox 1"/>
+          <p:cNvSpPr txBox="1"/>
+          <p:nvPr/>
+        </p:nvSpPr>
+        <p:spPr>
+          <a:xfrm>
+            <a:off x="548640" y="274320"/>
+            <a:ext cx="11064240" cy="822960"/>
+          </a:xfrm>
+          <a:prstGeom prst="rect">
+            <a:avLst/>
+          </a:prstGeom>
+          <a:noFill/>
+        </p:spPr>
+        <p:txBody>
+          <a:bodyPr wrap="square">
+            <a:spAutoFit/>
+          </a:bodyPr>
+          <a:lstStyle/>
+          <a:p>
+            <a:r>
+              <a:rPr sz="3000" b="1" i="0">
+                <a:solidFill>
+                  <a:srgbClr val="2B6CB0"/>
+                </a:solidFill>
+                <a:latin typeface="Calibri"/>
+              </a:rPr>
+              <a:t>Exit ticket — answers</a:t>
+            </a:r>
+          </a:p>
+        </p:txBody>
+      </p:sp>
+      <p:sp>
+        <p:nvSpPr>
+          <p:cNvPr id="3" name="TextBox 2"/>
+          <p:cNvSpPr txBox="1"/>
+          <p:nvPr/>
+        </p:nvSpPr>
+        <p:spPr>
+          <a:xfrm>
+            <a:off x="640080" y="1280160"/>
+            <a:ext cx="10881360" cy="5120640"/>
+          </a:xfrm>
+          <a:prstGeom prst="rect">
+            <a:avLst/>
+          </a:prstGeom>
+          <a:noFill/>
+        </p:spPr>
+        <p:txBody>
+          <a:bodyPr wrap="square">
+            <a:spAutoFit/>
+          </a:bodyPr>
+          <a:lstStyle/>
+          <a:p>
+            <a:r>
+              <a:rPr sz="2200" b="1">
+                <a:solidFill>
+                  <a:srgbClr val="222222"/>
+                </a:solidFill>
+                <a:latin typeface="Calibri"/>
+              </a:rPr>
+              <a:t>1. Give the physical mechanism for each: magnetic, optical, flash.</a:t>
+            </a:r>
+          </a:p>
+          <a:p>
+            <a:pPr lvl="1"/>
+            <a:r>
+              <a:rPr sz="1800" i="1">
+                <a:solidFill>
+                  <a:srgbClr val="B76E00"/>
+                </a:solidFill>
+                <a:latin typeface="Calibri"/>
+              </a:rPr>
+              <a:t>Answer: Magnetic: magnetised patterns on a platter/tape read by a head; optical: laser reads pits and lands; flash: electrons trapped in memory cells, no moving parts.</a:t>
+            </a:r>
+          </a:p>
+          <a:p>
+            <a:r>
+              <a:rPr sz="2200" b="1">
+                <a:solidFill>
+                  <a:srgbClr val="222222"/>
+                </a:solidFill>
+                <a:latin typeface="Calibri"/>
+              </a:rPr>
+              <a:t>2. What is the difference between virtual memory and virtual storage?</a:t>
+            </a:r>
+          </a:p>
+          <a:p>
+            <a:pPr lvl="1"/>
+            <a:r>
+              <a:rPr sz="1800" i="1">
+                <a:solidFill>
+                  <a:srgbClr val="B76E00"/>
+                </a:solidFill>
+                <a:latin typeface="Calibri"/>
+              </a:rPr>
+              <a:t>Answer: Virtual memory uses secondary storage as extra RAM via a paging file; virtual (cloud) storage keeps files on remote servers accessed over a network.</a:t>
+            </a:r>
+          </a:p>
+          <a:p>
+            <a:r>
+              <a:rPr sz="2200" b="1">
+                <a:solidFill>
+                  <a:srgbClr val="222222"/>
+                </a:solidFill>
+                <a:latin typeface="Calibri"/>
+              </a:rPr>
+              <a:t>3. Why is RAM described as volatile and ROM as non-volatile?</a:t>
+            </a:r>
+          </a:p>
+          <a:p>
+            <a:pPr lvl="1"/>
+            <a:r>
+              <a:rPr sz="1800" i="1">
+                <a:solidFill>
+                  <a:srgbClr val="B76E00"/>
+                </a:solidFill>
+                <a:latin typeface="Calibri"/>
+              </a:rPr>
+              <a:t>Answer: RAM loses its contents when power is removed; ROM keeps its contents (bootstrap/BIOS firmware) without power.</a:t>
             </a:r>
           </a:p>
         </p:txBody>
@@ -4098,7 +6638,7 @@
                 </a:solidFill>
                 <a:latin typeface="Calibri"/>
               </a:rPr>
-              <a:t>1. How does a magnetic hard disk drive (HDD) store data?</a:t>
+              <a:t>1. From 1.1.2: state two differences between RISC and CISC processors.</a:t>
             </a:r>
           </a:p>
           <a:p>
@@ -4110,7 +6650,7 @@
                 </a:solidFill>
                 <a:latin typeface="Calibri"/>
               </a:rPr>
-              <a:t>Answer: By magnetising patterns/polarity on a spinning platter, read and written by a read/write head.</a:t>
+              <a:t>Answer: Any two of: small simple set vs large complex set; fixed-length one-cycle vs variable-length multi-cycle instructions; complexity in software/compiler vs hardware; lower vs higher power.</a:t>
             </a:r>
           </a:p>
           <a:p>
@@ -4121,7 +6661,7 @@
                 </a:solidFill>
                 <a:latin typeface="Calibri"/>
               </a:rPr>
-              <a:t>2. Which storage type uses a laser to detect pits and lands?</a:t>
+              <a:t>2. From 1.1.2: why does a GPU outperform a CPU when applying one filter to every pixel of a photo?</a:t>
             </a:r>
           </a:p>
           <a:p>
@@ -4133,7 +6673,7 @@
                 </a:solidFill>
                 <a:latin typeface="Calibri"/>
               </a:rPr>
-              <a:t>Answer: Optical storage (CD/DVD/Blu-ray).</a:t>
+              <a:t>Answer: Its thousands of cores apply the same operation to many independent data items in parallel.</a:t>
             </a:r>
           </a:p>
           <a:p>
@@ -4144,7 +6684,7 @@
                 </a:solidFill>
                 <a:latin typeface="Calibri"/>
               </a:rPr>
-              <a:t>3. State two differences between RAM and ROM.</a:t>
+              <a:t>3. From 1.1.2: what limits the speed-up gained by adding more cores?</a:t>
             </a:r>
           </a:p>
           <a:p>
@@ -4156,7 +6696,7 @@
                 </a:solidFill>
                 <a:latin typeface="Calibri"/>
               </a:rPr>
-              <a:t>Answer: RAM is volatile and read/write holding running programs; ROM is non-volatile and normally read-only holding bootstrap/BIOS firmware.</a:t>
+              <a:t>Answer: The serial fraction/data dependencies, software not written for multiple threads, and coordination overhead.</a:t>
             </a:r>
           </a:p>
           <a:p>
@@ -4167,7 +6707,7 @@
                 </a:solidFill>
                 <a:latin typeface="Calibri"/>
               </a:rPr>
-              <a:t>4. From 1.1.1, what is cache memory and how does it differ from RAM?</a:t>
+              <a:t>4. From 1.1.1: state the roles of the MAR and the MDR during a fetch.</a:t>
             </a:r>
           </a:p>
           <a:p>
@@ -4179,7 +6719,7 @@
                 </a:solidFill>
                 <a:latin typeface="Calibri"/>
               </a:rPr>
-              <a:t>Answer: Small very fast memory on/near the CPU holding frequently used data; it is separate from and faster than main RAM.</a:t>
+              <a:t>Answer: MAR holds the address of the location being accessed; MDR holds the instruction or data transferred.</a:t>
             </a:r>
           </a:p>
           <a:p>
@@ -4190,7 +6730,7 @@
                 </a:solidFill>
                 <a:latin typeface="Calibri"/>
               </a:rPr>
-              <a:t>5. From 1.1.2, name one GPGPU use of a GPU.</a:t>
+              <a:t>5. From 1.1.1: what is cache and why does it improve performance?</a:t>
             </a:r>
           </a:p>
           <a:p>
@@ -4202,7 +6742,7 @@
                 </a:solidFill>
                 <a:latin typeface="Calibri"/>
               </a:rPr>
-              <a:t>Answer: Machine learning/neural network training (or simulation, image processing, crypto hashing).</a:t>
+              <a:t>Answer: Small, very fast memory on/near the CPU holding frequently used data, so fewer slow accesses to RAM are needed.</a:t>
             </a:r>
           </a:p>
         </p:txBody>
@@ -4297,6 +6837,86 @@
                 </a:solidFill>
                 <a:latin typeface="Calibri"/>
               </a:rPr>
+              <a:t>Volatile</a:t>
+            </a:r>
+            <a:r>
+              <a:rPr sz="1800">
+                <a:solidFill>
+                  <a:srgbClr val="222222"/>
+                </a:solidFill>
+                <a:latin typeface="Calibri"/>
+              </a:rPr>
+              <a:t> — Loses its contents when power is removed, like RAM.</a:t>
+            </a:r>
+          </a:p>
+          <a:p>
+            <a:r>
+              <a:rPr b="1" sz="2000">
+                <a:solidFill>
+                  <a:srgbClr val="1A365D"/>
+                </a:solidFill>
+                <a:latin typeface="Calibri"/>
+              </a:rPr>
+              <a:t>Non-volatile</a:t>
+            </a:r>
+            <a:r>
+              <a:rPr sz="1800">
+                <a:solidFill>
+                  <a:srgbClr val="222222"/>
+                </a:solidFill>
+                <a:latin typeface="Calibri"/>
+              </a:rPr>
+              <a:t> — Retains contents without power, like ROM and all secondary storage.</a:t>
+            </a:r>
+          </a:p>
+          <a:p>
+            <a:r>
+              <a:rPr b="1" sz="2000">
+                <a:solidFill>
+                  <a:srgbClr val="1A365D"/>
+                </a:solidFill>
+                <a:latin typeface="Calibri"/>
+              </a:rPr>
+              <a:t>RAM</a:t>
+            </a:r>
+            <a:r>
+              <a:rPr sz="1800">
+                <a:solidFill>
+                  <a:srgbClr val="222222"/>
+                </a:solidFill>
+                <a:latin typeface="Calibri"/>
+              </a:rPr>
+              <a:t> — Volatile read/write main memory holding currently running programs and their data.</a:t>
+            </a:r>
+          </a:p>
+          <a:p>
+            <a:r>
+              <a:rPr b="1" sz="2000">
+                <a:solidFill>
+                  <a:srgbClr val="1A365D"/>
+                </a:solidFill>
+                <a:latin typeface="Calibri"/>
+              </a:rPr>
+              <a:t>ROM</a:t>
+            </a:r>
+            <a:r>
+              <a:rPr sz="1800">
+                <a:solidFill>
+                  <a:srgbClr val="222222"/>
+                </a:solidFill>
+                <a:latin typeface="Calibri"/>
+              </a:rPr>
+              <a:t> — Non-volatile, normally read-only memory holding the bootstrap loader and BIOS firmware.</a:t>
+            </a:r>
+          </a:p>
+          <a:p>
+            <a:r>
+              <a:rPr b="1" sz="2000">
+                <a:solidFill>
+                  <a:srgbClr val="1A365D"/>
+                </a:solidFill>
+                <a:latin typeface="Calibri"/>
+              </a:rPr>
               <a:t>Magnetic storage</a:t>
             </a:r>
             <a:r>
@@ -4306,7 +6926,7 @@
                 </a:solidFill>
                 <a:latin typeface="Calibri"/>
               </a:rPr>
-              <a:t> — Stores data as magnetised patterns on a spinning platter or tape; huge capacity and low cost per GB but slow and fragile.</a:t>
+              <a:t> — Data stored as magnetised patterns on a spinning platter or tape, read by a read/write head.</a:t>
             </a:r>
           </a:p>
           <a:p>
@@ -4317,7 +6937,7 @@
                 </a:solidFill>
                 <a:latin typeface="Calibri"/>
               </a:rPr>
-              <a:t>Flash/SSD</a:t>
+              <a:t>Flash / SSD</a:t>
             </a:r>
             <a:r>
               <a:rPr sz="1800">
@@ -4326,7 +6946,7 @@
                 </a:solidFill>
                 <a:latin typeface="Calibri"/>
               </a:rPr>
-              <a:t> — EEPROM-based storage that traps electrons in cells with no moving parts; fast, silent, durable but costlier per GB with finite write cycles.</a:t>
+              <a:t> — Solid-state storage trapping electrons in EEPROM cells; no moving parts.</a:t>
             </a:r>
           </a:p>
           <a:p>
@@ -4346,7 +6966,7 @@
                 </a:solidFill>
                 <a:latin typeface="Calibri"/>
               </a:rPr>
-              <a:t> — Uses a laser to detect pits and lands on a disc; cheap and portable but low capacity and slow.</a:t>
+              <a:t> — A laser reads pits and lands on a disc surface via reflected light.</a:t>
             </a:r>
           </a:p>
           <a:p>
@@ -4357,7 +6977,7 @@
                 </a:solidFill>
                 <a:latin typeface="Calibri"/>
               </a:rPr>
-              <a:t>Volatile</a:t>
+              <a:t>Virtual memory</a:t>
             </a:r>
             <a:r>
               <a:rPr sz="1800">
@@ -4366,7 +6986,7 @@
                 </a:solidFill>
                 <a:latin typeface="Calibri"/>
               </a:rPr>
-              <a:t> — Loses its contents when power is removed, e.g. RAM.</a:t>
+              <a:t> — Use of secondary storage as extra RAM: less-used pages are swapped to a paging file.</a:t>
             </a:r>
           </a:p>
           <a:p>
@@ -4377,7 +6997,7 @@
                 </a:solidFill>
                 <a:latin typeface="Calibri"/>
               </a:rPr>
-              <a:t>ROM</a:t>
+              <a:t>Disk thrashing</a:t>
             </a:r>
             <a:r>
               <a:rPr sz="1800">
@@ -4386,67 +7006,7 @@
                 </a:solidFill>
                 <a:latin typeface="Calibri"/>
               </a:rPr>
-              <a:t> — Read Only Memory; non-volatile, normally read-only, typically holding the bootstrap loader/BIOS firmware.</a:t>
-            </a:r>
-          </a:p>
-          <a:p>
-            <a:r>
-              <a:rPr b="1" sz="2000">
-                <a:solidFill>
-                  <a:srgbClr val="1A365D"/>
-                </a:solidFill>
-                <a:latin typeface="Calibri"/>
-              </a:rPr>
-              <a:t>Virtual memory</a:t>
-            </a:r>
-            <a:r>
-              <a:rPr sz="1800">
-                <a:solidFill>
-                  <a:srgbClr val="222222"/>
-                </a:solidFill>
-                <a:latin typeface="Calibri"/>
-              </a:rPr>
-              <a:t> — Use of secondary storage (a swap/paging file) as extra RAM when physical RAM is full, moving pages in and out.</a:t>
-            </a:r>
-          </a:p>
-          <a:p>
-            <a:r>
-              <a:rPr b="1" sz="2000">
-                <a:solidFill>
-                  <a:srgbClr val="1A365D"/>
-                </a:solidFill>
-                <a:latin typeface="Calibri"/>
-              </a:rPr>
-              <a:t>Disk thrashing</a:t>
-            </a:r>
-            <a:r>
-              <a:rPr sz="1800">
-                <a:solidFill>
-                  <a:srgbClr val="222222"/>
-                </a:solidFill>
-                <a:latin typeface="Calibri"/>
-              </a:rPr>
-              <a:t> — Excessive paging where the system spends most of its time swapping pages rather than doing useful work, slowing it dramatically.</a:t>
-            </a:r>
-          </a:p>
-          <a:p>
-            <a:r>
-              <a:rPr b="1" sz="2000">
-                <a:solidFill>
-                  <a:srgbClr val="1A365D"/>
-                </a:solidFill>
-                <a:latin typeface="Calibri"/>
-              </a:rPr>
-              <a:t>Cloud/virtual storage</a:t>
-            </a:r>
-            <a:r>
-              <a:rPr sz="1800">
-                <a:solidFill>
-                  <a:srgbClr val="222222"/>
-                </a:solidFill>
-                <a:latin typeface="Calibri"/>
-              </a:rPr>
-              <a:t> — Remote storage on networked servers, accessible anywhere, scalable and off-site, but needing internet with ongoing cost and security concerns.</a:t>
+              <a:t> — Excessive paging where the system spends most of its time swapping pages rather than working.</a:t>
             </a:r>
           </a:p>
         </p:txBody>
@@ -4506,7 +7066,7 @@
                 </a:solidFill>
                 <a:latin typeface="Calibri"/>
               </a:rPr>
-              <a:t>Three storage technologies</a:t>
+              <a:t>Input and output devices</a:t>
             </a:r>
           </a:p>
         </p:txBody>
@@ -4535,37 +7095,61 @@
           <a:p>
             <a:pPr/>
             <a:r>
-              <a:rPr sz="2200" b="0">
-                <a:solidFill>
-                  <a:srgbClr val="222222"/>
-                </a:solidFill>
-                <a:latin typeface="Calibri"/>
-              </a:rPr>
-              <a:t>Magnetic (HDD, tape): magnetised patterns on a platter/tape; huge capacity, low cost per GB, but slow, fragile and noisy</a:t>
+              <a:rPr sz="2000" b="0">
+                <a:solidFill>
+                  <a:srgbClr val="222222"/>
+                </a:solidFill>
+                <a:latin typeface="Calibri"/>
+              </a:rPr>
+              <a:t>Input devices send data INTO the system: keyboard, mouse, touchscreen, barcode scanner, microphone, sensors</a:t>
             </a:r>
           </a:p>
           <a:p>
             <a:pPr/>
             <a:r>
-              <a:rPr sz="2200" b="0">
-                <a:solidFill>
-                  <a:srgbClr val="222222"/>
-                </a:solidFill>
-                <a:latin typeface="Calibri"/>
-              </a:rPr>
-              <a:t>Flash/SSD (SSD, USB, SD): traps electrons in EEPROM cells with no moving parts; fast, silent, durable, portable, but costlier per GB with finite write cycles</a:t>
+              <a:rPr sz="2000" b="0">
+                <a:solidFill>
+                  <a:srgbClr val="222222"/>
+                </a:solidFill>
+                <a:latin typeface="Calibri"/>
+              </a:rPr>
+              <a:t>Output devices act on the world: monitor, printer, speakers, and actuators (motors producing movement)</a:t>
             </a:r>
           </a:p>
           <a:p>
             <a:pPr/>
             <a:r>
-              <a:rPr sz="2200" b="0">
-                <a:solidFill>
-                  <a:srgbClr val="222222"/>
-                </a:solidFill>
-                <a:latin typeface="Calibri"/>
-              </a:rPr>
-              <a:t>Optical (CD/DVD/Blu-ray): laser detects pits and lands; very cheap and portable with long shelf life, but low capacity and slow</a:t>
+              <a:rPr sz="2000" b="0">
+                <a:solidFill>
+                  <a:srgbClr val="222222"/>
+                </a:solidFill>
+                <a:latin typeface="Calibri"/>
+              </a:rPr>
+              <a:t>A sensor is input; an actuator is output — pair them in control systems</a:t>
+            </a:r>
+          </a:p>
+          <a:p>
+            <a:pPr/>
+            <a:r>
+              <a:rPr sz="2000" b="0">
+                <a:solidFill>
+                  <a:srgbClr val="222222"/>
+                </a:solidFill>
+                <a:latin typeface="Calibri"/>
+              </a:rPr>
+              <a:t>A touchscreen is both input and output</a:t>
+            </a:r>
+          </a:p>
+          <a:p>
+            <a:pPr/>
+            <a:r>
+              <a:rPr sz="1800" b="1">
+                <a:solidFill>
+                  <a:srgbClr val="B76E00"/>
+                </a:solidFill>
+                <a:latin typeface="Calibri"/>
+              </a:rPr>
+              <a:t>An actuator is an OUTPUT device — a frequently mis-sorted exam item.</a:t>
             </a:r>
           </a:p>
         </p:txBody>
@@ -4625,7 +7209,7 @@
                 </a:solidFill>
                 <a:latin typeface="Calibri"/>
               </a:rPr>
-              <a:t>Access methods and secondary storage</a:t>
+              <a:t>Choosing devices for a scenario</a:t>
             </a:r>
           </a:p>
         </p:txBody>
@@ -4654,37 +7238,49 @@
           <a:p>
             <a:pPr/>
             <a:r>
-              <a:rPr sz="2200" b="0">
-                <a:solidFill>
-                  <a:srgbClr val="222222"/>
-                </a:solidFill>
-                <a:latin typeface="Calibri"/>
-              </a:rPr>
-              <a:t>Secondary storage is non-volatile, retaining data without power</a:t>
+              <a:rPr sz="2000" b="0">
+                <a:solidFill>
+                  <a:srgbClr val="222222"/>
+                </a:solidFill>
+                <a:latin typeface="Calibri"/>
+              </a:rPr>
+              <a:t>There is no single right device: justify choices against the scenario's stated needs</a:t>
             </a:r>
           </a:p>
           <a:p>
             <a:pPr/>
             <a:r>
-              <a:rPr sz="2200" b="0">
-                <a:solidFill>
-                  <a:srgbClr val="222222"/>
-                </a:solidFill>
-                <a:latin typeface="Calibri"/>
-              </a:rPr>
-              <a:t>Tape is serial access, ideal for cheap high-capacity archive/backup but poor for random access</a:t>
+              <a:rPr sz="2000" b="0">
+                <a:solidFill>
+                  <a:srgbClr val="222222"/>
+                </a:solidFill>
+                <a:latin typeface="Calibri"/>
+              </a:rPr>
+              <a:t>Consider environment (dust, vibration, heat), user and accessibility, accuracy, speed, cost, durability</a:t>
             </a:r>
           </a:p>
           <a:p>
             <a:pPr/>
             <a:r>
-              <a:rPr sz="2200" b="0">
-                <a:solidFill>
-                  <a:srgbClr val="222222"/>
-                </a:solidFill>
-                <a:latin typeface="Calibri"/>
-              </a:rPr>
-              <a:t>HDD and SSD offer direct/random access; flash uses wear levelling to spread writes across cells</a:t>
+              <a:rPr sz="2000" b="0">
+                <a:solidFill>
+                  <a:srgbClr val="222222"/>
+                </a:solidFill>
+                <a:latin typeface="Calibri"/>
+              </a:rPr>
+              <a:t>Printers: laser = fast, high volume, low cost per page (offices); inkjet = cheap to buy, good occasional colour (home); 3D = builds objects layer by layer</a:t>
+            </a:r>
+          </a:p>
+          <a:p>
+            <a:pPr/>
+            <a:r>
+              <a:rPr sz="2000" b="0">
+                <a:solidFill>
+                  <a:srgbClr val="222222"/>
+                </a:solidFill>
+                <a:latin typeface="Calibri"/>
+              </a:rPr>
+              <a:t>Full marks come from linking a characteristic to a requirement, not listing generic pros</a:t>
             </a:r>
           </a:p>
         </p:txBody>
@@ -4744,7 +7340,7 @@
                 </a:solidFill>
                 <a:latin typeface="Calibri"/>
               </a:rPr>
-              <a:t>RAM vs ROM</a:t>
+              <a:t>Primary vs secondary storage</a:t>
             </a:r>
           </a:p>
         </p:txBody>
@@ -4773,37 +7369,49 @@
           <a:p>
             <a:pPr/>
             <a:r>
-              <a:rPr sz="2200" b="0">
-                <a:solidFill>
-                  <a:srgbClr val="222222"/>
-                </a:solidFill>
-                <a:latin typeface="Calibri"/>
-              </a:rPr>
-              <a:t>RAM is volatile (lost on power off), read and written, and holds running programs and data</a:t>
+              <a:rPr sz="2000" b="0">
+                <a:solidFill>
+                  <a:srgbClr val="222222"/>
+                </a:solidFill>
+                <a:latin typeface="Calibri"/>
+              </a:rPr>
+              <a:t>Primary storage (RAM, ROM, cache) is directly accessed by the CPU</a:t>
             </a:r>
           </a:p>
           <a:p>
             <a:pPr/>
             <a:r>
-              <a:rPr sz="2200" b="0">
-                <a:solidFill>
-                  <a:srgbClr val="222222"/>
-                </a:solidFill>
-                <a:latin typeface="Calibri"/>
-              </a:rPr>
-              <a:t>ROM is non-volatile, normally read-only, and holds the bootstrap/BIOS firmware</a:t>
+              <a:rPr sz="2000" b="0">
+                <a:solidFill>
+                  <a:srgbClr val="222222"/>
+                </a:solidFill>
+                <a:latin typeface="Calibri"/>
+              </a:rPr>
+              <a:t>Secondary storage is non-volatile: it retains data with the power off</a:t>
             </a:r>
           </a:p>
           <a:p>
             <a:pPr/>
             <a:r>
-              <a:rPr sz="2200" b="0">
-                <a:solidFill>
-                  <a:srgbClr val="222222"/>
-                </a:solidFill>
-                <a:latin typeface="Calibri"/>
-              </a:rPr>
-              <a:t>Both are primary memory, distinct from slower secondary storage</a:t>
+              <a:rPr sz="2000" b="0">
+                <a:solidFill>
+                  <a:srgbClr val="222222"/>
+                </a:solidFill>
+                <a:latin typeface="Calibri"/>
+              </a:rPr>
+              <a:t>It holds files and software long-term; contents load into RAM to be used</a:t>
+            </a:r>
+          </a:p>
+          <a:p>
+            <a:pPr/>
+            <a:r>
+              <a:rPr sz="2000" b="0">
+                <a:solidFill>
+                  <a:srgbClr val="222222"/>
+                </a:solidFill>
+                <a:latin typeface="Calibri"/>
+              </a:rPr>
+              <a:t>Three secondary technologies to know: magnetic, flash (solid state) and optical</a:t>
             </a:r>
           </a:p>
         </p:txBody>
@@ -4863,7 +7471,7 @@
                 </a:solidFill>
                 <a:latin typeface="Calibri"/>
               </a:rPr>
-              <a:t>Virtual memory and cloud storage</a:t>
+              <a:t>Magnetic storage: HDD and tape</a:t>
             </a:r>
           </a:p>
         </p:txBody>
@@ -4892,37 +7500,49 @@
           <a:p>
             <a:pPr/>
             <a:r>
-              <a:rPr sz="2200" b="0">
-                <a:solidFill>
-                  <a:srgbClr val="222222"/>
-                </a:solidFill>
-                <a:latin typeface="Calibri"/>
-              </a:rPr>
-              <a:t>Virtual memory: when RAM is full the OS moves less-used pages to a swap/paging file on disk and back as needed, letting larger programs run</a:t>
+              <a:rPr sz="2000" b="0">
+                <a:solidFill>
+                  <a:srgbClr val="222222"/>
+                </a:solidFill>
+                <a:latin typeface="Calibri"/>
+              </a:rPr>
+              <a:t>Data stored as magnetised patterns on a spinning platter, read/written by a moving head on an actuator arm</a:t>
             </a:r>
           </a:p>
           <a:p>
             <a:pPr/>
             <a:r>
-              <a:rPr sz="2200" b="0">
-                <a:solidFill>
-                  <a:srgbClr val="222222"/>
-                </a:solidFill>
-                <a:latin typeface="Calibri"/>
-              </a:rPr>
-              <a:t>Drawback: disk is far slower than RAM, so heavy paging causes disk thrashing</a:t>
+              <a:rPr sz="2000" b="0">
+                <a:solidFill>
+                  <a:srgbClr val="222222"/>
+                </a:solidFill>
+                <a:latin typeface="Calibri"/>
+              </a:rPr>
+              <a:t>Huge capacity at a low cost per gigabyte</a:t>
             </a:r>
           </a:p>
           <a:p>
             <a:pPr/>
             <a:r>
-              <a:rPr sz="2200" b="0">
-                <a:solidFill>
-                  <a:srgbClr val="222222"/>
-                </a:solidFill>
-                <a:latin typeface="Calibri"/>
-              </a:rPr>
-              <a:t>Virtual/cloud storage: remote networked servers giving access anywhere, scalable capacity and off-site backup, but needing internet with ongoing cost and security concerns</a:t>
+              <a:rPr sz="2000" b="0">
+                <a:solidFill>
+                  <a:srgbClr val="222222"/>
+                </a:solidFill>
+                <a:latin typeface="Calibri"/>
+              </a:rPr>
+              <a:t>Moving parts make it slower, noisier and fragile if dropped</a:t>
+            </a:r>
+          </a:p>
+          <a:p>
+            <a:pPr/>
+            <a:r>
+              <a:rPr sz="2000" b="0">
+                <a:solidFill>
+                  <a:srgbClr val="222222"/>
+                </a:solidFill>
+                <a:latin typeface="Calibri"/>
+              </a:rPr>
+              <a:t>Magnetic tape is serial access: cheap at scale and long-lasting, ideal for archives and backups</a:t>
             </a:r>
           </a:p>
         </p:txBody>
